--- a/decks/03-skill-basics/3회차-Skill기초.pptx
+++ b/decks/03-skill-basics/3회차-Skill기초.pptx
@@ -2677,8 +2677,8 @@
         </p:nvSpPr>
         <p:spPr>
           <a:xfrm>
-            <a:off x="457200" y="2011680"/>
-            <a:ext cx="6766560" cy="2743200"/>
+            <a:off x="457200" y="2011679"/>
+            <a:ext cx="6766560" cy="4081939"/>
           </a:xfrm>
           <a:prstGeom prst="roundRect">
             <a:avLst>
@@ -2765,7 +2765,18 @@
                 <a:ea typeface="Pretendard" pitchFamily="34" charset="-122"/>
                 <a:cs typeface="Pretendard" pitchFamily="34" charset="-120"/>
               </a:rPr>
-              <a:t>① 문서 스킬 — 표준 초안·요약  [직접 실습]</a:t>
+              <a:t>① </a:t>
+            </a:r>
+            <a:r>
+              <a:rPr lang="ko-KR" altLang="en-US" sz="1600" b="1" dirty="0">
+                <a:solidFill>
+                  <a:srgbClr val="FFFFFF"/>
+                </a:solidFill>
+                <a:latin typeface="Pretendard" pitchFamily="34" charset="0"/>
+                <a:ea typeface="Pretendard" pitchFamily="34" charset="-122"/>
+                <a:cs typeface="Pretendard" pitchFamily="34" charset="-120"/>
+              </a:rPr>
+              <a:t>법률 상담 스킬</a:t>
             </a:r>
             <a:endParaRPr lang="en-US" sz="1600" dirty="0"/>
           </a:p>
@@ -2779,8 +2790,8 @@
         </p:nvSpPr>
         <p:spPr>
           <a:xfrm>
-            <a:off x="658368" y="2697480"/>
-            <a:ext cx="6400800" cy="1920240"/>
+            <a:off x="658368" y="2697479"/>
+            <a:ext cx="6400800" cy="2696051"/>
           </a:xfrm>
           <a:prstGeom prst="rect">
             <a:avLst/>
@@ -2791,6 +2802,153 @@
         <p:txBody>
           <a:bodyPr wrap="square" rtlCol="0" anchor="t"/>
           <a:lstStyle/>
+          <a:p>
+            <a:pPr marL="177800" indent="-177800">
+              <a:lnSpc>
+                <a:spcPct val="105000"/>
+              </a:lnSpc>
+              <a:spcAft>
+                <a:spcPts val="1000"/>
+              </a:spcAft>
+              <a:buSzPct val="100000"/>
+              <a:buChar char="•"/>
+            </a:pPr>
+            <a:r>
+              <a:rPr lang="en-US" sz="1600" dirty="0">
+                <a:latin typeface="Pretendard" pitchFamily="34" charset="0"/>
+                <a:ea typeface="Pretendard" pitchFamily="34" charset="-122"/>
+                <a:cs typeface="Pretendard" pitchFamily="34" charset="-120"/>
+              </a:rPr>
+              <a:t>Korean-law MCP </a:t>
+            </a:r>
+            <a:r>
+              <a:rPr lang="ko-KR" altLang="en-US" sz="1600" dirty="0">
+                <a:latin typeface="Pretendard" pitchFamily="34" charset="0"/>
+                <a:ea typeface="Pretendard" pitchFamily="34" charset="-122"/>
+                <a:cs typeface="Pretendard" pitchFamily="34" charset="-120"/>
+              </a:rPr>
+              <a:t>이용</a:t>
+            </a:r>
+            <a:r>
+              <a:rPr lang="en-US" altLang="ko-KR" sz="1600" dirty="0">
+                <a:latin typeface="Pretendard" pitchFamily="34" charset="0"/>
+                <a:ea typeface="Pretendard" pitchFamily="34" charset="-122"/>
+                <a:cs typeface="Pretendard" pitchFamily="34" charset="-120"/>
+              </a:rPr>
+              <a:t>: </a:t>
+            </a:r>
+            <a:r>
+              <a:rPr lang="ko-KR" altLang="en-US" sz="1600" dirty="0">
+                <a:latin typeface="Pretendard" pitchFamily="34" charset="0"/>
+                <a:ea typeface="Pretendard" pitchFamily="34" charset="-122"/>
+                <a:cs typeface="Pretendard" pitchFamily="34" charset="-120"/>
+              </a:rPr>
+              <a:t>독립 설치 또는 </a:t>
+            </a:r>
+            <a:r>
+              <a:rPr lang="en-US" altLang="ko-KR" sz="1600" dirty="0" err="1">
+                <a:latin typeface="Pretendard" pitchFamily="34" charset="0"/>
+                <a:ea typeface="Pretendard" pitchFamily="34" charset="-122"/>
+                <a:cs typeface="Pretendard" pitchFamily="34" charset="-120"/>
+              </a:rPr>
+              <a:t>PlayMCP</a:t>
+            </a:r>
+            <a:r>
+              <a:rPr lang="en-US" altLang="ko-KR" sz="1600" dirty="0">
+                <a:latin typeface="Pretendard" pitchFamily="34" charset="0"/>
+                <a:ea typeface="Pretendard" pitchFamily="34" charset="-122"/>
+                <a:cs typeface="Pretendard" pitchFamily="34" charset="-120"/>
+              </a:rPr>
+              <a:t> </a:t>
+            </a:r>
+            <a:r>
+              <a:rPr lang="ko-KR" altLang="en-US" sz="1600" dirty="0">
+                <a:latin typeface="Pretendard" pitchFamily="34" charset="0"/>
+                <a:ea typeface="Pretendard" pitchFamily="34" charset="-122"/>
+                <a:cs typeface="Pretendard" pitchFamily="34" charset="-120"/>
+              </a:rPr>
+              <a:t>통해 설치</a:t>
+            </a:r>
+            <a:br>
+              <a:rPr lang="en-US" altLang="ko-KR" sz="1600" dirty="0">
+                <a:latin typeface="Pretendard" pitchFamily="34" charset="0"/>
+                <a:ea typeface="Pretendard" pitchFamily="34" charset="-122"/>
+                <a:cs typeface="Pretendard" pitchFamily="34" charset="-120"/>
+              </a:rPr>
+            </a:br>
+            <a:r>
+              <a:rPr lang="en-US" altLang="ko-KR" sz="1600" dirty="0">
+                <a:solidFill>
+                  <a:srgbClr val="0563C1"/>
+                </a:solidFill>
+                <a:latin typeface="Pretendard" pitchFamily="34" charset="0"/>
+                <a:ea typeface="Pretendard" pitchFamily="34" charset="-122"/>
+                <a:cs typeface="Pretendard" pitchFamily="34" charset="-120"/>
+                <a:hlinkClick r:id="rId3">
+                  <a:extLst>
+                    <a:ext uri="{A12FA001-AC4F-418D-AE19-62706E023703}">
+                      <ahyp:hlinkClr xmlns:ahyp="http://schemas.microsoft.com/office/drawing/2018/hyperlinkcolor" val="tx"/>
+                    </a:ext>
+                  </a:extLst>
+                </a:hlinkClick>
+              </a:rPr>
+              <a:t>https://github.com/chrisryugj/</a:t>
+            </a:r>
+            <a:r>
+              <a:rPr lang="en-US" altLang="ko-KR" sz="1600" dirty="0">
+                <a:latin typeface="Pretendard" pitchFamily="34" charset="0"/>
+                <a:ea typeface="Pretendard" pitchFamily="34" charset="-122"/>
+                <a:cs typeface="Pretendard" pitchFamily="34" charset="-120"/>
+                <a:hlinkClick r:id="rId3">
+                  <a:extLst>
+                    <a:ext uri="{A12FA001-AC4F-418D-AE19-62706E023703}">
+                      <ahyp:hlinkClr xmlns:ahyp="http://schemas.microsoft.com/office/drawing/2018/hyperlinkcolor" val="tx"/>
+                    </a:ext>
+                  </a:extLst>
+                </a:hlinkClick>
+              </a:rPr>
+              <a:t>korean-law-mcp</a:t>
+            </a:r>
+            <a:endParaRPr lang="en-US" altLang="ko-KR" sz="1600" dirty="0">
+              <a:latin typeface="Pretendard" pitchFamily="34" charset="0"/>
+              <a:ea typeface="Pretendard" pitchFamily="34" charset="-122"/>
+              <a:cs typeface="Pretendard" pitchFamily="34" charset="-120"/>
+            </a:endParaRPr>
+          </a:p>
+          <a:p>
+            <a:pPr marL="177800" indent="-177800">
+              <a:lnSpc>
+                <a:spcPct val="105000"/>
+              </a:lnSpc>
+              <a:spcAft>
+                <a:spcPts val="1000"/>
+              </a:spcAft>
+              <a:buSzPct val="100000"/>
+              <a:buChar char="•"/>
+            </a:pPr>
+            <a:r>
+              <a:rPr lang="ko-KR" altLang="en-US" sz="1600" dirty="0"/>
+              <a:t>법령과 판례의 출처를 명확히 표기하도록 함</a:t>
+            </a:r>
+            <a:endParaRPr lang="en-US" altLang="ko-KR" sz="1600" dirty="0"/>
+          </a:p>
+          <a:p>
+            <a:pPr marL="177800" indent="-177800">
+              <a:lnSpc>
+                <a:spcPct val="105000"/>
+              </a:lnSpc>
+              <a:spcAft>
+                <a:spcPts val="1000"/>
+              </a:spcAft>
+              <a:buSzPct val="100000"/>
+              <a:buChar char="•"/>
+            </a:pPr>
+            <a:r>
+              <a:rPr lang="ko-KR" altLang="en-US" sz="1600" dirty="0"/>
+              <a:t>비 법률 전문가가 이해할 수 있게 쉽게 작성하도록 함</a:t>
+            </a:r>
+            <a:endParaRPr lang="en-US" sz="1600" dirty="0"/>
+          </a:p>
           <a:p>
             <a:pPr marL="177800" indent="-177800" algn="l">
               <a:lnSpc>
@@ -2803,17 +2961,18 @@
               <a:buChar char="•"/>
             </a:pPr>
             <a:r>
-              <a:rPr lang="en-US" sz="1600" dirty="0">
-                <a:solidFill>
-                  <a:srgbClr val="505060"/>
-                </a:solidFill>
-                <a:latin typeface="Pretendard" pitchFamily="34" charset="0"/>
-                <a:ea typeface="Pretendard" pitchFamily="34" charset="-122"/>
-                <a:cs typeface="Pretendard" pitchFamily="34" charset="-120"/>
-              </a:rPr>
-              <a:t>외부 도구 없이 지침만으로 동작</a:t>
-            </a:r>
-            <a:endParaRPr lang="en-US" sz="1600" dirty="0"/>
+              <a:rPr lang="ko-KR" altLang="en-US" sz="1600" dirty="0">
+                <a:latin typeface="Pretendard" pitchFamily="34" charset="0"/>
+                <a:ea typeface="Pretendard" pitchFamily="34" charset="-122"/>
+                <a:cs typeface="Pretendard" pitchFamily="34" charset="-120"/>
+              </a:rPr>
+              <a:t>먼저 프롬프트로 작성하여 테스트 및 개선</a:t>
+            </a:r>
+            <a:endParaRPr lang="en-US" altLang="ko-KR" sz="1600" dirty="0">
+              <a:latin typeface="Pretendard" pitchFamily="34" charset="0"/>
+              <a:ea typeface="Pretendard" pitchFamily="34" charset="-122"/>
+              <a:cs typeface="Pretendard" pitchFamily="34" charset="-120"/>
+            </a:endParaRPr>
           </a:p>
           <a:p>
             <a:pPr marL="177800" indent="-177800" algn="l">
@@ -2828,17 +2987,201 @@
             </a:pPr>
             <a:r>
               <a:rPr lang="en-US" sz="1600" dirty="0">
-                <a:solidFill>
-                  <a:srgbClr val="505060"/>
-                </a:solidFill>
-                <a:latin typeface="Pretendard" pitchFamily="34" charset="0"/>
-                <a:ea typeface="Pretendard" pitchFamily="34" charset="-122"/>
-                <a:cs typeface="Pretendard" pitchFamily="34" charset="-120"/>
-              </a:rPr>
-              <a:t>자주 쓰는 보고서·회의록 양식을 SKILL.md에 담아 /문서초안 또는 /문서요약으로 호출</a:t>
+                <a:latin typeface="Pretendard" pitchFamily="34" charset="0"/>
+                <a:ea typeface="Pretendard" pitchFamily="34" charset="-122"/>
+                <a:cs typeface="Pretendard" pitchFamily="34" charset="-120"/>
+              </a:rPr>
+              <a:t>Claude Code</a:t>
+            </a:r>
+            <a:r>
+              <a:rPr lang="ko-KR" altLang="en-US" sz="1600" dirty="0">
+                <a:latin typeface="Pretendard" pitchFamily="34" charset="0"/>
+                <a:ea typeface="Pretendard" pitchFamily="34" charset="-122"/>
+                <a:cs typeface="Pretendard" pitchFamily="34" charset="-120"/>
+              </a:rPr>
+              <a:t>에 프롬프트를 제시하여 스킬 작성 요청</a:t>
             </a:r>
             <a:endParaRPr lang="en-US" sz="1600" dirty="0"/>
           </a:p>
+        </p:txBody>
+      </p:sp>
+      <p:sp>
+        <p:nvSpPr>
+          <p:cNvPr id="9" name="Shape 7"/>
+          <p:cNvSpPr/>
+          <p:nvPr/>
+        </p:nvSpPr>
+        <p:spPr>
+          <a:xfrm>
+            <a:off x="7406640" y="2011679"/>
+            <a:ext cx="6766560" cy="4081939"/>
+          </a:xfrm>
+          <a:prstGeom prst="roundRect">
+            <a:avLst>
+              <a:gd name="adj" fmla="val 2667"/>
+            </a:avLst>
+          </a:prstGeom>
+          <a:solidFill>
+            <a:srgbClr val="F5F5F7"/>
+          </a:solidFill>
+          <a:ln w="12700">
+            <a:solidFill>
+              <a:srgbClr val="DDDDE0"/>
+            </a:solidFill>
+            <a:prstDash val="solid"/>
+          </a:ln>
+        </p:spPr>
+        <p:txBody>
+          <a:bodyPr/>
+          <a:lstStyle/>
+          <a:p>
+            <a:endParaRPr lang="ko-KR" altLang="en-US"/>
+          </a:p>
+        </p:txBody>
+      </p:sp>
+      <p:sp>
+        <p:nvSpPr>
+          <p:cNvPr id="10" name="Shape 8"/>
+          <p:cNvSpPr/>
+          <p:nvPr/>
+        </p:nvSpPr>
+        <p:spPr>
+          <a:xfrm>
+            <a:off x="7406640" y="2011680"/>
+            <a:ext cx="6766560" cy="502920"/>
+          </a:xfrm>
+          <a:prstGeom prst="roundRect">
+            <a:avLst>
+              <a:gd name="adj" fmla="val 14545"/>
+            </a:avLst>
+          </a:prstGeom>
+          <a:solidFill>
+            <a:srgbClr val="C0530A"/>
+          </a:solidFill>
+          <a:ln/>
+        </p:spPr>
+        <p:txBody>
+          <a:bodyPr/>
+          <a:lstStyle/>
+          <a:p>
+            <a:endParaRPr lang="ko-KR" altLang="en-US"/>
+          </a:p>
+        </p:txBody>
+      </p:sp>
+      <p:sp>
+        <p:nvSpPr>
+          <p:cNvPr id="11" name="Text 9"/>
+          <p:cNvSpPr/>
+          <p:nvPr/>
+        </p:nvSpPr>
+        <p:spPr>
+          <a:xfrm>
+            <a:off x="7406640" y="2011680"/>
+            <a:ext cx="6766560" cy="502920"/>
+          </a:xfrm>
+          <a:prstGeom prst="rect">
+            <a:avLst/>
+          </a:prstGeom>
+          <a:noFill/>
+          <a:ln/>
+        </p:spPr>
+        <p:txBody>
+          <a:bodyPr wrap="square" rtlCol="0" anchor="ctr"/>
+          <a:lstStyle/>
+          <a:p>
+            <a:pPr marL="0" indent="0" algn="ctr">
+              <a:buNone/>
+            </a:pPr>
+            <a:r>
+              <a:rPr lang="en-US" sz="1600" b="1" dirty="0">
+                <a:solidFill>
+                  <a:srgbClr val="FFFFFF"/>
+                </a:solidFill>
+                <a:latin typeface="Pretendard" pitchFamily="34" charset="0"/>
+                <a:ea typeface="Pretendard" pitchFamily="34" charset="-122"/>
+                <a:cs typeface="Pretendard" pitchFamily="34" charset="-120"/>
+              </a:rPr>
+              <a:t>② </a:t>
+            </a:r>
+            <a:r>
+              <a:rPr lang="ko-KR" altLang="en-US" sz="1600" b="1" dirty="0">
+                <a:solidFill>
+                  <a:srgbClr val="FFFFFF"/>
+                </a:solidFill>
+                <a:latin typeface="Pretendard" pitchFamily="34" charset="0"/>
+                <a:ea typeface="Pretendard" pitchFamily="34" charset="-122"/>
+                <a:cs typeface="Pretendard" pitchFamily="34" charset="-120"/>
+              </a:rPr>
+              <a:t>기업 </a:t>
+            </a:r>
+            <a:r>
+              <a:rPr lang="en-US" sz="1600" b="1" dirty="0" err="1">
+                <a:solidFill>
+                  <a:srgbClr val="FFFFFF"/>
+                </a:solidFill>
+                <a:latin typeface="Pretendard" pitchFamily="34" charset="0"/>
+                <a:ea typeface="Pretendard" pitchFamily="34" charset="-122"/>
+                <a:cs typeface="Pretendard" pitchFamily="34" charset="-120"/>
+              </a:rPr>
+              <a:t>정보조사</a:t>
+            </a:r>
+            <a:r>
+              <a:rPr lang="en-US" sz="1600" b="1" dirty="0">
+                <a:solidFill>
+                  <a:srgbClr val="FFFFFF"/>
+                </a:solidFill>
+                <a:latin typeface="Pretendard" pitchFamily="34" charset="0"/>
+                <a:ea typeface="Pretendard" pitchFamily="34" charset="-122"/>
+                <a:cs typeface="Pretendard" pitchFamily="34" charset="-120"/>
+              </a:rPr>
+              <a:t> 스킬 — </a:t>
+            </a:r>
+            <a:r>
+              <a:rPr lang="en-US" sz="1600" b="1" dirty="0" err="1">
+                <a:solidFill>
+                  <a:srgbClr val="FFFFFF"/>
+                </a:solidFill>
+                <a:latin typeface="Pretendard" pitchFamily="34" charset="0"/>
+                <a:ea typeface="Pretendard" pitchFamily="34" charset="-122"/>
+                <a:cs typeface="Pretendard" pitchFamily="34" charset="-120"/>
+              </a:rPr>
+              <a:t>조사→레포트→슬라이드</a:t>
+            </a:r>
+            <a:r>
+              <a:rPr lang="en-US" sz="1600" b="1" dirty="0">
+                <a:solidFill>
+                  <a:srgbClr val="FFFFFF"/>
+                </a:solidFill>
+                <a:latin typeface="Pretendard" pitchFamily="34" charset="0"/>
+                <a:ea typeface="Pretendard" pitchFamily="34" charset="-122"/>
+                <a:cs typeface="Pretendard" pitchFamily="34" charset="-120"/>
+              </a:rPr>
+              <a:t> </a:t>
+            </a:r>
+            <a:endParaRPr lang="en-US" sz="1600" dirty="0"/>
+          </a:p>
+        </p:txBody>
+      </p:sp>
+      <p:sp>
+        <p:nvSpPr>
+          <p:cNvPr id="12" name="Text 10"/>
+          <p:cNvSpPr/>
+          <p:nvPr/>
+        </p:nvSpPr>
+        <p:spPr>
+          <a:xfrm>
+            <a:off x="7607808" y="2697479"/>
+            <a:ext cx="6400800" cy="2696051"/>
+          </a:xfrm>
+          <a:prstGeom prst="rect">
+            <a:avLst/>
+          </a:prstGeom>
+          <a:noFill/>
+          <a:ln/>
+        </p:spPr>
+        <p:txBody>
+          <a:bodyPr wrap="square" rtlCol="0" anchor="t"/>
+          <a:lstStyle/>
           <a:p>
             <a:pPr marL="177800" indent="-177800" algn="l">
               <a:lnSpc>
@@ -2851,144 +3194,119 @@
               <a:buChar char="•"/>
             </a:pPr>
             <a:r>
+              <a:rPr lang="ko-KR" altLang="en-US" sz="1600" dirty="0">
+                <a:latin typeface="Pretendard" pitchFamily="34" charset="0"/>
+                <a:ea typeface="Pretendard" pitchFamily="34" charset="-122"/>
+                <a:cs typeface="Pretendard" pitchFamily="34" charset="-120"/>
+              </a:rPr>
+              <a:t>웹과 </a:t>
+            </a:r>
+            <a:r>
+              <a:rPr lang="en-US" altLang="ko-KR" sz="1600" dirty="0">
+                <a:latin typeface="Pretendard" pitchFamily="34" charset="0"/>
+                <a:ea typeface="Pretendard" pitchFamily="34" charset="-122"/>
+                <a:cs typeface="Pretendard" pitchFamily="34" charset="-120"/>
+              </a:rPr>
+              <a:t>DART MCP</a:t>
+            </a:r>
+            <a:r>
+              <a:rPr lang="ko-KR" altLang="en-US" sz="1600" dirty="0">
+                <a:latin typeface="Pretendard" pitchFamily="34" charset="0"/>
+                <a:ea typeface="Pretendard" pitchFamily="34" charset="-122"/>
+                <a:cs typeface="Pretendard" pitchFamily="34" charset="-120"/>
+              </a:rPr>
+              <a:t>로 </a:t>
+            </a:r>
+            <a:r>
+              <a:rPr lang="en-US" sz="1600" dirty="0" err="1">
+                <a:latin typeface="Pretendard" pitchFamily="34" charset="0"/>
+                <a:ea typeface="Pretendard" pitchFamily="34" charset="-122"/>
+                <a:cs typeface="Pretendard" pitchFamily="34" charset="-120"/>
+              </a:rPr>
+              <a:t>특정</a:t>
+            </a:r>
+            <a:r>
+              <a:rPr lang="en-US" sz="1600" dirty="0">
+                <a:latin typeface="Pretendard" pitchFamily="34" charset="0"/>
+                <a:ea typeface="Pretendard" pitchFamily="34" charset="-122"/>
+                <a:cs typeface="Pretendard" pitchFamily="34" charset="-120"/>
+              </a:rPr>
+              <a:t> </a:t>
+            </a:r>
+            <a:r>
+              <a:rPr lang="ko-KR" altLang="en-US" sz="1600" dirty="0">
+                <a:latin typeface="Pretendard" pitchFamily="34" charset="0"/>
+                <a:ea typeface="Pretendard" pitchFamily="34" charset="-122"/>
+                <a:cs typeface="Pretendard" pitchFamily="34" charset="-120"/>
+              </a:rPr>
+              <a:t>기업</a:t>
+            </a:r>
+            <a:r>
+              <a:rPr lang="en-US" sz="1600" dirty="0">
+                <a:latin typeface="Pretendard" pitchFamily="34" charset="0"/>
+                <a:ea typeface="Pretendard" pitchFamily="34" charset="-122"/>
+                <a:cs typeface="Pretendard" pitchFamily="34" charset="-120"/>
+              </a:rPr>
+              <a:t> 검색 → 레포트 작성 → 웹페이지 가시화 → PPT 슬라이드까지 </a:t>
+            </a:r>
+            <a:r>
+              <a:rPr lang="en-US" sz="1600" dirty="0" err="1">
+                <a:latin typeface="Pretendard" pitchFamily="34" charset="0"/>
+                <a:ea typeface="Pretendard" pitchFamily="34" charset="-122"/>
+                <a:cs typeface="Pretendard" pitchFamily="34" charset="-120"/>
+              </a:rPr>
+              <a:t>단계</a:t>
+            </a:r>
+            <a:r>
+              <a:rPr lang="en-US" sz="1600" dirty="0">
+                <a:latin typeface="Pretendard" pitchFamily="34" charset="0"/>
+                <a:ea typeface="Pretendard" pitchFamily="34" charset="-122"/>
+                <a:cs typeface="Pretendard" pitchFamily="34" charset="-120"/>
+              </a:rPr>
+              <a:t> </a:t>
+            </a:r>
+            <a:r>
+              <a:rPr lang="en-US" sz="1600" dirty="0" err="1">
+                <a:latin typeface="Pretendard" pitchFamily="34" charset="0"/>
+                <a:ea typeface="Pretendard" pitchFamily="34" charset="-122"/>
+                <a:cs typeface="Pretendard" pitchFamily="34" charset="-120"/>
+              </a:rPr>
+              <a:t>실행</a:t>
+            </a:r>
+            <a:br>
+              <a:rPr lang="en-US" sz="1600" dirty="0">
+                <a:latin typeface="Pretendard" pitchFamily="34" charset="0"/>
+                <a:ea typeface="Pretendard" pitchFamily="34" charset="-122"/>
+                <a:cs typeface="Pretendard" pitchFamily="34" charset="-120"/>
+              </a:rPr>
+            </a:br>
+            <a:r>
               <a:rPr lang="en-US" sz="1600" b="1" dirty="0">
-                <a:solidFill>
-                  <a:srgbClr val="2C2926"/>
-                </a:solidFill>
-                <a:latin typeface="Pretendard" pitchFamily="34" charset="0"/>
-                <a:ea typeface="Pretendard" pitchFamily="34" charset="-122"/>
-                <a:cs typeface="Pretendard" pitchFamily="34" charset="-120"/>
-              </a:rPr>
-              <a:t>→ 매번 양식을 설명하지 않고 한 번에 표준 초안 생성</a:t>
-            </a:r>
-            <a:endParaRPr lang="en-US" sz="1600" dirty="0"/>
-          </a:p>
-        </p:txBody>
-      </p:sp>
-      <p:sp>
-        <p:nvSpPr>
-          <p:cNvPr id="9" name="Shape 7"/>
-          <p:cNvSpPr/>
-          <p:nvPr/>
-        </p:nvSpPr>
-        <p:spPr>
-          <a:xfrm>
-            <a:off x="7406640" y="2011680"/>
-            <a:ext cx="6766560" cy="2743200"/>
-          </a:xfrm>
-          <a:prstGeom prst="roundRect">
-            <a:avLst>
-              <a:gd name="adj" fmla="val 2667"/>
-            </a:avLst>
-          </a:prstGeom>
-          <a:solidFill>
-            <a:srgbClr val="F5F5F7"/>
-          </a:solidFill>
-          <a:ln w="12700">
-            <a:solidFill>
-              <a:srgbClr val="DDDDE0"/>
-            </a:solidFill>
-            <a:prstDash val="solid"/>
-          </a:ln>
-        </p:spPr>
-        <p:txBody>
-          <a:bodyPr/>
-          <a:lstStyle/>
-          <a:p>
-            <a:endParaRPr lang="ko-KR" altLang="en-US"/>
-          </a:p>
-        </p:txBody>
-      </p:sp>
-      <p:sp>
-        <p:nvSpPr>
-          <p:cNvPr id="10" name="Shape 8"/>
-          <p:cNvSpPr/>
-          <p:nvPr/>
-        </p:nvSpPr>
-        <p:spPr>
-          <a:xfrm>
-            <a:off x="7406640" y="2011680"/>
-            <a:ext cx="6766560" cy="502920"/>
-          </a:xfrm>
-          <a:prstGeom prst="roundRect">
-            <a:avLst>
-              <a:gd name="adj" fmla="val 14545"/>
-            </a:avLst>
-          </a:prstGeom>
-          <a:solidFill>
-            <a:srgbClr val="C0530A"/>
-          </a:solidFill>
-          <a:ln/>
-        </p:spPr>
-        <p:txBody>
-          <a:bodyPr/>
-          <a:lstStyle/>
-          <a:p>
-            <a:endParaRPr lang="ko-KR" altLang="en-US"/>
-          </a:p>
-        </p:txBody>
-      </p:sp>
-      <p:sp>
-        <p:nvSpPr>
-          <p:cNvPr id="11" name="Text 9"/>
-          <p:cNvSpPr/>
-          <p:nvPr/>
-        </p:nvSpPr>
-        <p:spPr>
-          <a:xfrm>
-            <a:off x="7406640" y="2011680"/>
-            <a:ext cx="6766560" cy="502920"/>
-          </a:xfrm>
-          <a:prstGeom prst="rect">
-            <a:avLst/>
-          </a:prstGeom>
-          <a:noFill/>
-          <a:ln/>
-        </p:spPr>
-        <p:txBody>
-          <a:bodyPr wrap="square" rtlCol="0" anchor="ctr"/>
-          <a:lstStyle/>
-          <a:p>
-            <a:pPr marL="0" indent="0" algn="ctr">
-              <a:buNone/>
-            </a:pPr>
+                <a:latin typeface="Pretendard" pitchFamily="34" charset="0"/>
+                <a:ea typeface="Pretendard" pitchFamily="34" charset="-122"/>
+                <a:cs typeface="Pretendard" pitchFamily="34" charset="-120"/>
+              </a:rPr>
+              <a:t>→ 여러 단계 절차를 하나의 레시피로 묶는 체험 (웹/DART 검색·PPT 생성 등 도구 연동 </a:t>
+            </a:r>
+            <a:r>
+              <a:rPr lang="en-US" sz="1600" b="1" dirty="0" err="1">
+                <a:latin typeface="Pretendard" pitchFamily="34" charset="0"/>
+                <a:ea typeface="Pretendard" pitchFamily="34" charset="-122"/>
+                <a:cs typeface="Pretendard" pitchFamily="34" charset="-120"/>
+              </a:rPr>
+              <a:t>포함</a:t>
+            </a:r>
             <a:r>
               <a:rPr lang="en-US" sz="1600" b="1" dirty="0">
-                <a:solidFill>
-                  <a:srgbClr val="FFFFFF"/>
-                </a:solidFill>
-                <a:latin typeface="Pretendard" pitchFamily="34" charset="0"/>
-                <a:ea typeface="Pretendard" pitchFamily="34" charset="-122"/>
-                <a:cs typeface="Pretendard" pitchFamily="34" charset="-120"/>
-              </a:rPr>
-              <a:t>② 정보조사 스킬 — 조사→레포트→슬라이드  [데모]</a:t>
-            </a:r>
-            <a:endParaRPr lang="en-US" sz="1600" dirty="0"/>
-          </a:p>
-        </p:txBody>
-      </p:sp>
-      <p:sp>
-        <p:nvSpPr>
-          <p:cNvPr id="12" name="Text 10"/>
-          <p:cNvSpPr/>
-          <p:nvPr/>
-        </p:nvSpPr>
-        <p:spPr>
-          <a:xfrm>
-            <a:off x="7607808" y="2697480"/>
-            <a:ext cx="6400800" cy="1920240"/>
-          </a:xfrm>
-          <a:prstGeom prst="rect">
-            <a:avLst/>
-          </a:prstGeom>
-          <a:noFill/>
-          <a:ln/>
-        </p:spPr>
-        <p:txBody>
-          <a:bodyPr wrap="square" rtlCol="0" anchor="t"/>
-          <a:lstStyle/>
-          <a:p>
-            <a:pPr marL="177800" indent="-177800" algn="l">
+                <a:latin typeface="Pretendard" pitchFamily="34" charset="0"/>
+                <a:ea typeface="Pretendard" pitchFamily="34" charset="-122"/>
+                <a:cs typeface="Pretendard" pitchFamily="34" charset="-120"/>
+              </a:rPr>
+              <a:t>)</a:t>
+            </a:r>
+          </a:p>
+          <a:p>
+            <a:pPr marL="177800" indent="-177800">
               <a:lnSpc>
                 <a:spcPct val="105000"/>
               </a:lnSpc>
@@ -2999,20 +3317,76 @@
               <a:buChar char="•"/>
             </a:pPr>
             <a:r>
-              <a:rPr lang="en-US" sz="1600" dirty="0">
-                <a:solidFill>
-                  <a:srgbClr val="505060"/>
-                </a:solidFill>
-                <a:latin typeface="Pretendard" pitchFamily="34" charset="0"/>
-                <a:ea typeface="Pretendard" pitchFamily="34" charset="-122"/>
-                <a:cs typeface="Pretendard" pitchFamily="34" charset="-120"/>
-              </a:rPr>
-              <a:t>한 번의 호출로 특정 주제 검색 → 레포트 작성 → 웹페이지 가시화 → PPT 슬라이드까지 단계 실행</a:t>
-            </a:r>
-            <a:endParaRPr lang="en-US" sz="1600" dirty="0"/>
-          </a:p>
-          <a:p>
-            <a:pPr marL="177800" indent="-177800" algn="l">
+              <a:rPr lang="en-US" altLang="ko-KR" sz="1600" dirty="0">
+                <a:latin typeface="Pretendard" pitchFamily="34" charset="0"/>
+                <a:ea typeface="Pretendard" pitchFamily="34" charset="-122"/>
+                <a:cs typeface="Pretendard" pitchFamily="34" charset="-120"/>
+              </a:rPr>
+              <a:t>DART </a:t>
+            </a:r>
+            <a:r>
+              <a:rPr lang="en-US" altLang="ko-KR" sz="1600" dirty="0" err="1">
+                <a:latin typeface="Pretendard" pitchFamily="34" charset="0"/>
+                <a:ea typeface="Pretendard" pitchFamily="34" charset="-122"/>
+                <a:cs typeface="Pretendard" pitchFamily="34" charset="-120"/>
+              </a:rPr>
+              <a:t>mcp</a:t>
+            </a:r>
+            <a:r>
+              <a:rPr lang="ko-KR" altLang="en-US" sz="1600" dirty="0">
+                <a:latin typeface="Pretendard" pitchFamily="34" charset="0"/>
+                <a:ea typeface="Pretendard" pitchFamily="34" charset="-122"/>
+                <a:cs typeface="Pretendard" pitchFamily="34" charset="-120"/>
+              </a:rPr>
+              <a:t>는 독립설치 또는 </a:t>
+            </a:r>
+            <a:r>
+              <a:rPr lang="en-US" altLang="ko-KR" sz="1600" dirty="0" err="1">
+                <a:latin typeface="Pretendard" pitchFamily="34" charset="0"/>
+                <a:ea typeface="Pretendard" pitchFamily="34" charset="-122"/>
+                <a:cs typeface="Pretendard" pitchFamily="34" charset="-120"/>
+              </a:rPr>
+              <a:t>PlayMCP</a:t>
+            </a:r>
+            <a:r>
+              <a:rPr lang="en-US" altLang="ko-KR" sz="1600" dirty="0">
+                <a:latin typeface="Pretendard" pitchFamily="34" charset="0"/>
+                <a:ea typeface="Pretendard" pitchFamily="34" charset="-122"/>
+                <a:cs typeface="Pretendard" pitchFamily="34" charset="-120"/>
+              </a:rPr>
+              <a:t> </a:t>
+            </a:r>
+            <a:r>
+              <a:rPr lang="ko-KR" altLang="en-US" sz="1600" dirty="0">
+                <a:latin typeface="Pretendard" pitchFamily="34" charset="0"/>
+                <a:ea typeface="Pretendard" pitchFamily="34" charset="-122"/>
+                <a:cs typeface="Pretendard" pitchFamily="34" charset="-120"/>
+              </a:rPr>
+              <a:t>통해 설치</a:t>
+            </a:r>
+            <a:br>
+              <a:rPr lang="en-US" altLang="ko-KR" sz="1600" dirty="0">
+                <a:latin typeface="Pretendard" pitchFamily="34" charset="0"/>
+                <a:ea typeface="Pretendard" pitchFamily="34" charset="-122"/>
+                <a:cs typeface="Pretendard" pitchFamily="34" charset="-120"/>
+              </a:rPr>
+            </a:br>
+            <a:r>
+              <a:rPr lang="en-US" altLang="ko-KR" sz="1600" dirty="0">
+                <a:latin typeface="Pretendard" pitchFamily="34" charset="0"/>
+                <a:ea typeface="Pretendard" pitchFamily="34" charset="-122"/>
+                <a:cs typeface="Pretendard" pitchFamily="34" charset="-120"/>
+              </a:rPr>
+              <a:t>https://mcp.directory/servers/korean-stock-market-dart-krx</a:t>
+            </a:r>
+            <a:endParaRPr lang="en-US" sz="1600" dirty="0">
+              <a:latin typeface="Pretendard" pitchFamily="34" charset="0"/>
+              <a:ea typeface="Pretendard" pitchFamily="34" charset="-122"/>
+              <a:cs typeface="Pretendard" pitchFamily="34" charset="-120"/>
+            </a:endParaRPr>
+          </a:p>
+          <a:p>
+            <a:pPr marL="177800" indent="-177800">
               <a:lnSpc>
                 <a:spcPct val="105000"/>
               </a:lnSpc>
@@ -3023,88 +3397,88 @@
               <a:buChar char="•"/>
             </a:pPr>
             <a:r>
-              <a:rPr lang="en-US" sz="1600" b="1" dirty="0">
-                <a:solidFill>
-                  <a:srgbClr val="2C2926"/>
-                </a:solidFill>
-                <a:latin typeface="Pretendard" pitchFamily="34" charset="0"/>
-                <a:ea typeface="Pretendard" pitchFamily="34" charset="-122"/>
-                <a:cs typeface="Pretendard" pitchFamily="34" charset="-120"/>
-              </a:rPr>
-              <a:t>→ 여러 단계 절차를 하나의 레시피로 묶는 체험 (웹 검색·PPT 생성 등 도구 연동 포함)</a:t>
-            </a:r>
-            <a:endParaRPr lang="en-US" sz="1600" dirty="0"/>
-          </a:p>
-        </p:txBody>
-      </p:sp>
-      <p:sp>
-        <p:nvSpPr>
-          <p:cNvPr id="13" name="Shape 11"/>
-          <p:cNvSpPr/>
-          <p:nvPr/>
-        </p:nvSpPr>
-        <p:spPr>
-          <a:xfrm>
-            <a:off x="457200" y="5029200"/>
-            <a:ext cx="13716000" cy="777240"/>
-          </a:xfrm>
-          <a:prstGeom prst="roundRect">
-            <a:avLst>
-              <a:gd name="adj" fmla="val 9412"/>
-            </a:avLst>
-          </a:prstGeom>
-          <a:solidFill>
-            <a:srgbClr val="CCFBF1"/>
-          </a:solidFill>
-          <a:ln/>
-        </p:spPr>
-        <p:txBody>
-          <a:bodyPr/>
-          <a:lstStyle/>
-          <a:p>
-            <a:endParaRPr lang="ko-KR" altLang="en-US"/>
-          </a:p>
-        </p:txBody>
-      </p:sp>
-      <p:sp>
-        <p:nvSpPr>
-          <p:cNvPr id="14" name="Text 12"/>
-          <p:cNvSpPr/>
-          <p:nvPr/>
-        </p:nvSpPr>
-        <p:spPr>
-          <a:xfrm>
-            <a:off x="640080" y="5029200"/>
-            <a:ext cx="13350240" cy="777240"/>
-          </a:xfrm>
-          <a:prstGeom prst="rect">
-            <a:avLst/>
-          </a:prstGeom>
-          <a:noFill/>
-          <a:ln/>
-        </p:spPr>
-        <p:txBody>
-          <a:bodyPr wrap="square" rtlCol="0" anchor="ctr"/>
-          <a:lstStyle/>
-          <a:p>
-            <a:pPr marL="0" indent="0" algn="l">
+              <a:rPr lang="ko-KR" altLang="en-US" sz="1600" dirty="0">
+                <a:latin typeface="Pretendard" pitchFamily="34" charset="0"/>
+                <a:ea typeface="Pretendard" pitchFamily="34" charset="-122"/>
+                <a:cs typeface="Pretendard" pitchFamily="34" charset="-120"/>
+              </a:rPr>
+              <a:t>결과 레포트의 </a:t>
+            </a:r>
+            <a:r>
+              <a:rPr lang="ko-KR" altLang="en-US" sz="1600" dirty="0" err="1">
+                <a:latin typeface="Pretendard" pitchFamily="34" charset="0"/>
+                <a:ea typeface="Pretendard" pitchFamily="34" charset="-122"/>
+                <a:cs typeface="Pretendard" pitchFamily="34" charset="-120"/>
+              </a:rPr>
+              <a:t>아젠다를</a:t>
+            </a:r>
+            <a:r>
+              <a:rPr lang="ko-KR" altLang="en-US" sz="1600" dirty="0">
+                <a:latin typeface="Pretendard" pitchFamily="34" charset="0"/>
+                <a:ea typeface="Pretendard" pitchFamily="34" charset="-122"/>
+                <a:cs typeface="Pretendard" pitchFamily="34" charset="-120"/>
+              </a:rPr>
+              <a:t> 제시 받고 진행함</a:t>
+            </a:r>
+            <a:endParaRPr lang="en-US" altLang="ko-KR" sz="1600" dirty="0">
+              <a:latin typeface="Pretendard" pitchFamily="34" charset="0"/>
+              <a:ea typeface="Pretendard" pitchFamily="34" charset="-122"/>
+              <a:cs typeface="Pretendard" pitchFamily="34" charset="-120"/>
+            </a:endParaRPr>
+          </a:p>
+          <a:p>
+            <a:pPr marL="177800" indent="-177800">
               <a:lnSpc>
                 <a:spcPct val="105000"/>
               </a:lnSpc>
-              <a:buNone/>
+              <a:spcAft>
+                <a:spcPts val="1000"/>
+              </a:spcAft>
+              <a:buSzPct val="100000"/>
+              <a:buChar char="•"/>
             </a:pPr>
             <a:r>
-              <a:rPr lang="en-US" sz="1600" b="1" dirty="0">
-                <a:solidFill>
-                  <a:srgbClr val="2C2926"/>
-                </a:solidFill>
-                <a:latin typeface="Pretendard" pitchFamily="34" charset="0"/>
-                <a:ea typeface="Pretendard" pitchFamily="34" charset="-122"/>
-                <a:cs typeface="Pretendard" pitchFamily="34" charset="-120"/>
-              </a:rPr>
-              <a:t>오늘의 산출물: 직접 만드는 것은 ①(SKILL.md 1개, 문서 초안 생성용) — name·description·본문(목표·작업방법·출력)을 갖춰 완성   ·   (선택) 법률 상담 스킬(Korean Law MCP) 데모 관찰</a:t>
-            </a:r>
-            <a:endParaRPr lang="en-US" sz="1600" dirty="0"/>
+              <a:rPr lang="ko-KR" altLang="en-US" sz="1600" dirty="0">
+                <a:latin typeface="Pretendard" pitchFamily="34" charset="0"/>
+                <a:ea typeface="Pretendard" pitchFamily="34" charset="-122"/>
+                <a:cs typeface="Pretendard" pitchFamily="34" charset="-120"/>
+              </a:rPr>
+              <a:t>먼저 프롬프트로 작성하여 테스트 및 개선</a:t>
+            </a:r>
+            <a:endParaRPr lang="en-US" altLang="ko-KR" sz="1600" dirty="0">
+              <a:latin typeface="Pretendard" pitchFamily="34" charset="0"/>
+              <a:ea typeface="Pretendard" pitchFamily="34" charset="-122"/>
+              <a:cs typeface="Pretendard" pitchFamily="34" charset="-120"/>
+            </a:endParaRPr>
+          </a:p>
+          <a:p>
+            <a:pPr marL="177800" indent="-177800">
+              <a:lnSpc>
+                <a:spcPct val="105000"/>
+              </a:lnSpc>
+              <a:spcAft>
+                <a:spcPts val="1000"/>
+              </a:spcAft>
+              <a:buSzPct val="100000"/>
+              <a:buChar char="•"/>
+            </a:pPr>
+            <a:r>
+              <a:rPr lang="en-US" altLang="ko-KR" sz="1600" dirty="0">
+                <a:latin typeface="Pretendard" pitchFamily="34" charset="0"/>
+                <a:ea typeface="Pretendard" pitchFamily="34" charset="-122"/>
+                <a:cs typeface="Pretendard" pitchFamily="34" charset="-120"/>
+              </a:rPr>
+              <a:t>Claude Code</a:t>
+            </a:r>
+            <a:r>
+              <a:rPr lang="ko-KR" altLang="en-US" sz="1600" dirty="0">
+                <a:latin typeface="Pretendard" pitchFamily="34" charset="0"/>
+                <a:ea typeface="Pretendard" pitchFamily="34" charset="-122"/>
+                <a:cs typeface="Pretendard" pitchFamily="34" charset="-120"/>
+              </a:rPr>
+              <a:t>에 프롬프트를 제시하여 스킬 작성 요청</a:t>
+            </a:r>
+            <a:endParaRPr lang="en-US" altLang="ko-KR" sz="1600" dirty="0"/>
           </a:p>
         </p:txBody>
       </p:sp>
@@ -3156,6 +3530,208 @@
           </a:p>
         </p:txBody>
       </p:sp>
+      <p:grpSp>
+        <p:nvGrpSpPr>
+          <p:cNvPr id="15" name="그룹 14">
+            <a:extLst>
+              <a:ext uri="{FF2B5EF4-FFF2-40B4-BE49-F238E27FC236}">
+                <a16:creationId xmlns:a16="http://schemas.microsoft.com/office/drawing/2014/main" id="{9B956212-1F7F-031E-A9D6-DE8B5B17327A}"/>
+              </a:ext>
+            </a:extLst>
+          </p:cNvPr>
+          <p:cNvGrpSpPr/>
+          <p:nvPr/>
+        </p:nvGrpSpPr>
+        <p:grpSpPr>
+          <a:xfrm>
+            <a:off x="457200" y="6416531"/>
+            <a:ext cx="6766560" cy="505770"/>
+            <a:chOff x="457200" y="5492123"/>
+            <a:chExt cx="5943600" cy="822960"/>
+          </a:xfrm>
+        </p:grpSpPr>
+        <p:sp>
+          <p:nvSpPr>
+            <p:cNvPr id="16" name="Shape 8">
+              <a:extLst>
+                <a:ext uri="{FF2B5EF4-FFF2-40B4-BE49-F238E27FC236}">
+                  <a16:creationId xmlns:a16="http://schemas.microsoft.com/office/drawing/2014/main" id="{31003E4D-3F10-3CD0-1A11-259BD3D9D847}"/>
+                </a:ext>
+              </a:extLst>
+            </p:cNvPr>
+            <p:cNvSpPr/>
+            <p:nvPr/>
+          </p:nvSpPr>
+          <p:spPr>
+            <a:xfrm>
+              <a:off x="457200" y="5492123"/>
+              <a:ext cx="5943600" cy="822960"/>
+            </a:xfrm>
+            <a:prstGeom prst="roundRect">
+              <a:avLst>
+                <a:gd name="adj" fmla="val 6667"/>
+              </a:avLst>
+            </a:prstGeom>
+            <a:solidFill>
+              <a:srgbClr val="059669"/>
+            </a:solidFill>
+            <a:ln/>
+          </p:spPr>
+          <p:txBody>
+            <a:bodyPr/>
+            <a:lstStyle/>
+            <a:p>
+              <a:endParaRPr lang="ko-KR" altLang="en-US"/>
+            </a:p>
+          </p:txBody>
+        </p:sp>
+        <p:sp>
+          <p:nvSpPr>
+            <p:cNvPr id="17" name="Text 9">
+              <a:extLst>
+                <a:ext uri="{FF2B5EF4-FFF2-40B4-BE49-F238E27FC236}">
+                  <a16:creationId xmlns:a16="http://schemas.microsoft.com/office/drawing/2014/main" id="{BB3FDFC5-8ACD-0D28-CE77-952AE5C95121}"/>
+                </a:ext>
+              </a:extLst>
+            </p:cNvPr>
+            <p:cNvSpPr/>
+            <p:nvPr/>
+          </p:nvSpPr>
+          <p:spPr>
+            <a:xfrm>
+              <a:off x="457200" y="5492123"/>
+              <a:ext cx="5943600" cy="822960"/>
+            </a:xfrm>
+            <a:prstGeom prst="rect">
+              <a:avLst/>
+            </a:prstGeom>
+            <a:noFill/>
+            <a:ln/>
+          </p:spPr>
+          <p:txBody>
+            <a:bodyPr wrap="square" rtlCol="0" anchor="ctr"/>
+            <a:lstStyle/>
+            <a:p>
+              <a:pPr marL="0" indent="0" algn="ctr">
+                <a:buNone/>
+              </a:pPr>
+              <a:r>
+                <a:rPr lang="ko-KR" altLang="en-US" sz="1600" b="1" dirty="0">
+                  <a:solidFill>
+                    <a:srgbClr val="FFFFFF"/>
+                  </a:solidFill>
+                  <a:latin typeface="Pretendard" pitchFamily="34" charset="0"/>
+                  <a:ea typeface="Pretendard" pitchFamily="34" charset="-122"/>
+                  <a:cs typeface="Pretendard" pitchFamily="34" charset="-120"/>
+                </a:rPr>
+                <a:t>프롬프트 예시</a:t>
+              </a:r>
+              <a:endParaRPr lang="en-US" sz="1600" dirty="0"/>
+            </a:p>
+          </p:txBody>
+        </p:sp>
+      </p:grpSp>
+      <p:grpSp>
+        <p:nvGrpSpPr>
+          <p:cNvPr id="18" name="그룹 17">
+            <a:extLst>
+              <a:ext uri="{FF2B5EF4-FFF2-40B4-BE49-F238E27FC236}">
+                <a16:creationId xmlns:a16="http://schemas.microsoft.com/office/drawing/2014/main" id="{B51BBB4B-2809-C11A-5DFE-7164DEAF06EF}"/>
+              </a:ext>
+            </a:extLst>
+          </p:cNvPr>
+          <p:cNvGrpSpPr/>
+          <p:nvPr/>
+        </p:nvGrpSpPr>
+        <p:grpSpPr>
+          <a:xfrm>
+            <a:off x="7406640" y="6404625"/>
+            <a:ext cx="6766560" cy="505770"/>
+            <a:chOff x="457200" y="5492123"/>
+            <a:chExt cx="5943600" cy="822960"/>
+          </a:xfrm>
+        </p:grpSpPr>
+        <p:sp>
+          <p:nvSpPr>
+            <p:cNvPr id="19" name="Shape 8">
+              <a:extLst>
+                <a:ext uri="{FF2B5EF4-FFF2-40B4-BE49-F238E27FC236}">
+                  <a16:creationId xmlns:a16="http://schemas.microsoft.com/office/drawing/2014/main" id="{E2A40E22-5EF2-13B1-56D6-D16DFA98A0A9}"/>
+                </a:ext>
+              </a:extLst>
+            </p:cNvPr>
+            <p:cNvSpPr/>
+            <p:nvPr/>
+          </p:nvSpPr>
+          <p:spPr>
+            <a:xfrm>
+              <a:off x="457200" y="5492123"/>
+              <a:ext cx="5943600" cy="822960"/>
+            </a:xfrm>
+            <a:prstGeom prst="roundRect">
+              <a:avLst>
+                <a:gd name="adj" fmla="val 6667"/>
+              </a:avLst>
+            </a:prstGeom>
+            <a:solidFill>
+              <a:srgbClr val="059669"/>
+            </a:solidFill>
+            <a:ln/>
+          </p:spPr>
+          <p:txBody>
+            <a:bodyPr/>
+            <a:lstStyle/>
+            <a:p>
+              <a:endParaRPr lang="ko-KR" altLang="en-US"/>
+            </a:p>
+          </p:txBody>
+        </p:sp>
+        <p:sp>
+          <p:nvSpPr>
+            <p:cNvPr id="20" name="Text 9">
+              <a:extLst>
+                <a:ext uri="{FF2B5EF4-FFF2-40B4-BE49-F238E27FC236}">
+                  <a16:creationId xmlns:a16="http://schemas.microsoft.com/office/drawing/2014/main" id="{4E41D19A-CDD9-7882-997B-EBA0387F34C5}"/>
+                </a:ext>
+              </a:extLst>
+            </p:cNvPr>
+            <p:cNvSpPr/>
+            <p:nvPr/>
+          </p:nvSpPr>
+          <p:spPr>
+            <a:xfrm>
+              <a:off x="457200" y="5492123"/>
+              <a:ext cx="5943600" cy="822960"/>
+            </a:xfrm>
+            <a:prstGeom prst="rect">
+              <a:avLst/>
+            </a:prstGeom>
+            <a:noFill/>
+            <a:ln/>
+          </p:spPr>
+          <p:txBody>
+            <a:bodyPr wrap="square" rtlCol="0" anchor="ctr"/>
+            <a:lstStyle/>
+            <a:p>
+              <a:pPr marL="0" indent="0" algn="ctr">
+                <a:buNone/>
+              </a:pPr>
+              <a:r>
+                <a:rPr lang="ko-KR" altLang="en-US" sz="1600" b="1" dirty="0">
+                  <a:solidFill>
+                    <a:srgbClr val="FFFFFF"/>
+                  </a:solidFill>
+                  <a:latin typeface="Pretendard" pitchFamily="34" charset="0"/>
+                  <a:ea typeface="Pretendard" pitchFamily="34" charset="-122"/>
+                  <a:cs typeface="Pretendard" pitchFamily="34" charset="-120"/>
+                </a:rPr>
+                <a:t>프롬프트 예시</a:t>
+              </a:r>
+              <a:endParaRPr lang="en-US" sz="1600" dirty="0"/>
+            </a:p>
+          </p:txBody>
+        </p:sp>
+      </p:grpSp>
     </p:spTree>
   </p:cSld>
   <p:clrMapOvr>
@@ -13733,134 +14309,50 @@
                 <a:ea typeface="Pretendard" pitchFamily="34" charset="-122"/>
                 <a:cs typeface="Pretendard" pitchFamily="34" charset="-120"/>
               </a:rPr>
-              <a:t>지금 변경한 코드의 버그·정리할 곳을 점검</a:t>
-            </a:r>
-            <a:endParaRPr lang="en-US" sz="1600" dirty="0"/>
-          </a:p>
-        </p:txBody>
-      </p:sp>
-      <p:sp>
-        <p:nvSpPr>
-          <p:cNvPr id="13" name="Shape 11"/>
-          <p:cNvSpPr/>
-          <p:nvPr/>
-        </p:nvSpPr>
-        <p:spPr>
-          <a:xfrm>
-            <a:off x="9729216" y="1687350"/>
-            <a:ext cx="4434840" cy="2606040"/>
-          </a:xfrm>
-          <a:prstGeom prst="roundRect">
-            <a:avLst>
-              <a:gd name="adj" fmla="val 2807"/>
-            </a:avLst>
-          </a:prstGeom>
-          <a:solidFill>
-            <a:srgbClr val="F5F5F7"/>
-          </a:solidFill>
-          <a:ln w="12700">
-            <a:solidFill>
-              <a:srgbClr val="DDDDE0"/>
-            </a:solidFill>
-            <a:prstDash val="solid"/>
-          </a:ln>
-        </p:spPr>
-        <p:txBody>
-          <a:bodyPr/>
-          <a:lstStyle/>
-          <a:p>
-            <a:endParaRPr lang="ko-KR" altLang="en-US"/>
-          </a:p>
-        </p:txBody>
-      </p:sp>
-      <p:sp>
-        <p:nvSpPr>
-          <p:cNvPr id="14" name="Shape 12"/>
-          <p:cNvSpPr/>
-          <p:nvPr/>
-        </p:nvSpPr>
-        <p:spPr>
-          <a:xfrm>
-            <a:off x="9729216" y="1687350"/>
-            <a:ext cx="4434840" cy="502920"/>
-          </a:xfrm>
-          <a:prstGeom prst="roundRect">
-            <a:avLst>
-              <a:gd name="adj" fmla="val 14545"/>
-            </a:avLst>
-          </a:prstGeom>
-          <a:solidFill>
-            <a:srgbClr val="1A5E7E"/>
-          </a:solidFill>
-          <a:ln/>
-        </p:spPr>
-        <p:txBody>
-          <a:bodyPr/>
-          <a:lstStyle/>
-          <a:p>
-            <a:endParaRPr lang="ko-KR" altLang="en-US"/>
-          </a:p>
-        </p:txBody>
-      </p:sp>
-      <p:sp>
-        <p:nvSpPr>
-          <p:cNvPr id="15" name="Text 13"/>
-          <p:cNvSpPr/>
-          <p:nvPr/>
-        </p:nvSpPr>
-        <p:spPr>
-          <a:xfrm>
-            <a:off x="9729216" y="1687350"/>
-            <a:ext cx="4434840" cy="502920"/>
-          </a:xfrm>
-          <a:prstGeom prst="rect">
-            <a:avLst/>
-          </a:prstGeom>
-          <a:noFill/>
-          <a:ln/>
-        </p:spPr>
-        <p:txBody>
-          <a:bodyPr wrap="square" rtlCol="0" anchor="ctr"/>
-          <a:lstStyle/>
-          <a:p>
-            <a:pPr marL="0" indent="0" algn="ctr">
-              <a:buNone/>
-            </a:pPr>
-            <a:r>
-              <a:rPr lang="en-US" sz="1600" b="1" dirty="0">
-                <a:solidFill>
-                  <a:srgbClr val="FFFFFF"/>
-                </a:solidFill>
-                <a:latin typeface="Pretendard" pitchFamily="34" charset="0"/>
-                <a:ea typeface="Pretendard" pitchFamily="34" charset="-122"/>
-                <a:cs typeface="Pretendard" pitchFamily="34" charset="-120"/>
-              </a:rPr>
-              <a:t>/security-review · 보안</a:t>
-            </a:r>
-            <a:endParaRPr lang="en-US" sz="1600" dirty="0"/>
-          </a:p>
-        </p:txBody>
-      </p:sp>
-      <p:sp>
-        <p:nvSpPr>
-          <p:cNvPr id="16" name="Text 14"/>
-          <p:cNvSpPr/>
-          <p:nvPr/>
-        </p:nvSpPr>
-        <p:spPr>
-          <a:xfrm>
-            <a:off x="9930384" y="2309142"/>
-            <a:ext cx="4032504" cy="1874520"/>
-          </a:xfrm>
-          <a:prstGeom prst="rect">
-            <a:avLst/>
-          </a:prstGeom>
-          <a:noFill/>
-          <a:ln/>
-        </p:spPr>
-        <p:txBody>
-          <a:bodyPr wrap="square" rtlCol="0" anchor="t"/>
-          <a:lstStyle/>
+              <a:t>지금 변경한 코드의 버그·정리할 </a:t>
+            </a:r>
+            <a:r>
+              <a:rPr lang="en-US" sz="1600" dirty="0" err="1">
+                <a:solidFill>
+                  <a:srgbClr val="505060"/>
+                </a:solidFill>
+                <a:latin typeface="Pretendard" pitchFamily="34" charset="0"/>
+                <a:ea typeface="Pretendard" pitchFamily="34" charset="-122"/>
+                <a:cs typeface="Pretendard" pitchFamily="34" charset="-120"/>
+              </a:rPr>
+              <a:t>곳을</a:t>
+            </a:r>
+            <a:r>
+              <a:rPr lang="en-US" sz="1600" dirty="0">
+                <a:solidFill>
+                  <a:srgbClr val="505060"/>
+                </a:solidFill>
+                <a:latin typeface="Pretendard" pitchFamily="34" charset="0"/>
+                <a:ea typeface="Pretendard" pitchFamily="34" charset="-122"/>
+                <a:cs typeface="Pretendard" pitchFamily="34" charset="-120"/>
+              </a:rPr>
+              <a:t> </a:t>
+            </a:r>
+            <a:r>
+              <a:rPr lang="en-US" sz="1600" dirty="0" err="1">
+                <a:solidFill>
+                  <a:srgbClr val="505060"/>
+                </a:solidFill>
+                <a:latin typeface="Pretendard" pitchFamily="34" charset="0"/>
+                <a:ea typeface="Pretendard" pitchFamily="34" charset="-122"/>
+                <a:cs typeface="Pretendard" pitchFamily="34" charset="-120"/>
+              </a:rPr>
+              <a:t>점검</a:t>
+            </a:r>
+            <a:endParaRPr lang="en-US" sz="1600" dirty="0">
+              <a:solidFill>
+                <a:srgbClr val="505060"/>
+              </a:solidFill>
+              <a:latin typeface="Pretendard" pitchFamily="34" charset="0"/>
+              <a:ea typeface="Pretendard" pitchFamily="34" charset="-122"/>
+              <a:cs typeface="Pretendard" pitchFamily="34" charset="-120"/>
+            </a:endParaRPr>
+          </a:p>
           <a:p>
             <a:pPr marL="177800" indent="-177800" algn="l">
               <a:lnSpc>
@@ -13873,7 +14365,7 @@
               <a:buChar char="•"/>
             </a:pPr>
             <a:r>
-              <a:rPr lang="en-US" sz="1600" dirty="0">
+              <a:rPr lang="ko-KR" altLang="en-US" sz="1600" dirty="0">
                 <a:solidFill>
                   <a:srgbClr val="505060"/>
                 </a:solidFill>
@@ -13881,9 +14373,38 @@
                 <a:ea typeface="Pretendard" pitchFamily="34" charset="-122"/>
                 <a:cs typeface="Pretendard" pitchFamily="34" charset="-120"/>
               </a:rPr>
-              <a:t>변경분을 보안 취약점(인젝션·인증·데이터 노출) 관점에서 분석</a:t>
-            </a:r>
-            <a:endParaRPr lang="en-US" sz="1600" dirty="0"/>
+              <a:t>변경 사항이 있는 경우에만 수행되므로 수행 전에 </a:t>
+            </a:r>
+            <a:r>
+              <a:rPr lang="en-US" altLang="ko-KR" sz="1600" dirty="0">
+                <a:solidFill>
+                  <a:srgbClr val="505060"/>
+                </a:solidFill>
+                <a:latin typeface="Pretendard" pitchFamily="34" charset="0"/>
+                <a:ea typeface="Pretendard" pitchFamily="34" charset="-122"/>
+                <a:cs typeface="Pretendard" pitchFamily="34" charset="-120"/>
+              </a:rPr>
+              <a:t>‘git commit’ </a:t>
+            </a:r>
+            <a:r>
+              <a:rPr lang="ko-KR" altLang="en-US" sz="1600" dirty="0">
+                <a:solidFill>
+                  <a:srgbClr val="505060"/>
+                </a:solidFill>
+                <a:latin typeface="Pretendard" pitchFamily="34" charset="0"/>
+                <a:ea typeface="Pretendard" pitchFamily="34" charset="-122"/>
+                <a:cs typeface="Pretendard" pitchFamily="34" charset="-120"/>
+              </a:rPr>
+              <a:t>필요</a:t>
+            </a:r>
+            <a:endParaRPr lang="en-US" altLang="ko-KR" sz="1600" dirty="0">
+              <a:solidFill>
+                <a:srgbClr val="505060"/>
+              </a:solidFill>
+              <a:latin typeface="Pretendard" pitchFamily="34" charset="0"/>
+              <a:ea typeface="Pretendard" pitchFamily="34" charset="-122"/>
+              <a:cs typeface="Pretendard" pitchFamily="34" charset="-120"/>
+            </a:endParaRPr>
           </a:p>
           <a:p>
             <a:pPr marL="177800" indent="-177800" algn="l">
@@ -13897,6 +14418,198 @@
               <a:buChar char="•"/>
             </a:pPr>
             <a:r>
+              <a:rPr lang="ko-KR" altLang="en-US" sz="1600" dirty="0">
+                <a:solidFill>
+                  <a:srgbClr val="505060"/>
+                </a:solidFill>
+                <a:latin typeface="Pretendard" pitchFamily="34" charset="0"/>
+                <a:ea typeface="Pretendard" pitchFamily="34" charset="-122"/>
+                <a:cs typeface="Pretendard" pitchFamily="34" charset="-120"/>
+              </a:rPr>
+              <a:t>예</a:t>
+            </a:r>
+            <a:r>
+              <a:rPr lang="en-US" altLang="ko-KR" sz="1600" dirty="0">
+                <a:solidFill>
+                  <a:srgbClr val="505060"/>
+                </a:solidFill>
+                <a:latin typeface="Pretendard" pitchFamily="34" charset="0"/>
+                <a:ea typeface="Pretendard" pitchFamily="34" charset="-122"/>
+                <a:cs typeface="Pretendard" pitchFamily="34" charset="-120"/>
+              </a:rPr>
+              <a:t>: /code-review</a:t>
+            </a:r>
+            <a:r>
+              <a:rPr lang="ko-KR" altLang="en-US" sz="1600" dirty="0">
+                <a:solidFill>
+                  <a:srgbClr val="505060"/>
+                </a:solidFill>
+                <a:latin typeface="Pretendard" pitchFamily="34" charset="0"/>
+                <a:ea typeface="Pretendard" pitchFamily="34" charset="-122"/>
+                <a:cs typeface="Pretendard" pitchFamily="34" charset="-120"/>
+              </a:rPr>
+              <a:t> </a:t>
+            </a:r>
+            <a:r>
+              <a:rPr lang="ko-KR" altLang="en-US" sz="1600" dirty="0" err="1">
+                <a:solidFill>
+                  <a:srgbClr val="505060"/>
+                </a:solidFill>
+                <a:latin typeface="Pretendard" pitchFamily="34" charset="0"/>
+                <a:ea typeface="Pretendard" pitchFamily="34" charset="-122"/>
+                <a:cs typeface="Pretendard" pitchFamily="34" charset="-120"/>
+              </a:rPr>
+              <a:t>커밋</a:t>
+            </a:r>
+            <a:r>
+              <a:rPr lang="ko-KR" altLang="en-US" sz="1600" dirty="0">
+                <a:solidFill>
+                  <a:srgbClr val="505060"/>
+                </a:solidFill>
+                <a:latin typeface="Pretendard" pitchFamily="34" charset="0"/>
+                <a:ea typeface="Pretendard" pitchFamily="34" charset="-122"/>
+                <a:cs typeface="Pretendard" pitchFamily="34" charset="-120"/>
+              </a:rPr>
+              <a:t> 후 수행</a:t>
+            </a:r>
+            <a:endParaRPr lang="en-US" sz="1600" dirty="0"/>
+          </a:p>
+        </p:txBody>
+      </p:sp>
+      <p:sp>
+        <p:nvSpPr>
+          <p:cNvPr id="13" name="Shape 11"/>
+          <p:cNvSpPr/>
+          <p:nvPr/>
+        </p:nvSpPr>
+        <p:spPr>
+          <a:xfrm>
+            <a:off x="9729216" y="1687350"/>
+            <a:ext cx="4434840" cy="2606040"/>
+          </a:xfrm>
+          <a:prstGeom prst="roundRect">
+            <a:avLst>
+              <a:gd name="adj" fmla="val 2807"/>
+            </a:avLst>
+          </a:prstGeom>
+          <a:solidFill>
+            <a:srgbClr val="F5F5F7"/>
+          </a:solidFill>
+          <a:ln w="12700">
+            <a:solidFill>
+              <a:srgbClr val="DDDDE0"/>
+            </a:solidFill>
+            <a:prstDash val="solid"/>
+          </a:ln>
+        </p:spPr>
+        <p:txBody>
+          <a:bodyPr/>
+          <a:lstStyle/>
+          <a:p>
+            <a:endParaRPr lang="ko-KR" altLang="en-US"/>
+          </a:p>
+        </p:txBody>
+      </p:sp>
+      <p:sp>
+        <p:nvSpPr>
+          <p:cNvPr id="14" name="Shape 12"/>
+          <p:cNvSpPr/>
+          <p:nvPr/>
+        </p:nvSpPr>
+        <p:spPr>
+          <a:xfrm>
+            <a:off x="9729216" y="1687350"/>
+            <a:ext cx="4434840" cy="502920"/>
+          </a:xfrm>
+          <a:prstGeom prst="roundRect">
+            <a:avLst>
+              <a:gd name="adj" fmla="val 14545"/>
+            </a:avLst>
+          </a:prstGeom>
+          <a:solidFill>
+            <a:srgbClr val="1A5E7E"/>
+          </a:solidFill>
+          <a:ln/>
+        </p:spPr>
+        <p:txBody>
+          <a:bodyPr/>
+          <a:lstStyle/>
+          <a:p>
+            <a:endParaRPr lang="ko-KR" altLang="en-US"/>
+          </a:p>
+        </p:txBody>
+      </p:sp>
+      <p:sp>
+        <p:nvSpPr>
+          <p:cNvPr id="15" name="Text 13"/>
+          <p:cNvSpPr/>
+          <p:nvPr/>
+        </p:nvSpPr>
+        <p:spPr>
+          <a:xfrm>
+            <a:off x="9729216" y="1687350"/>
+            <a:ext cx="4434840" cy="502920"/>
+          </a:xfrm>
+          <a:prstGeom prst="rect">
+            <a:avLst/>
+          </a:prstGeom>
+          <a:noFill/>
+          <a:ln/>
+        </p:spPr>
+        <p:txBody>
+          <a:bodyPr wrap="square" rtlCol="0" anchor="ctr"/>
+          <a:lstStyle/>
+          <a:p>
+            <a:pPr marL="0" indent="0" algn="ctr">
+              <a:buNone/>
+            </a:pPr>
+            <a:r>
+              <a:rPr lang="en-US" sz="1600" b="1" dirty="0">
+                <a:solidFill>
+                  <a:srgbClr val="FFFFFF"/>
+                </a:solidFill>
+                <a:latin typeface="Pretendard" pitchFamily="34" charset="0"/>
+                <a:ea typeface="Pretendard" pitchFamily="34" charset="-122"/>
+                <a:cs typeface="Pretendard" pitchFamily="34" charset="-120"/>
+              </a:rPr>
+              <a:t>/security-review · 보안</a:t>
+            </a:r>
+            <a:endParaRPr lang="en-US" sz="1600" dirty="0"/>
+          </a:p>
+        </p:txBody>
+      </p:sp>
+      <p:sp>
+        <p:nvSpPr>
+          <p:cNvPr id="16" name="Text 14"/>
+          <p:cNvSpPr/>
+          <p:nvPr/>
+        </p:nvSpPr>
+        <p:spPr>
+          <a:xfrm>
+            <a:off x="9930384" y="2309142"/>
+            <a:ext cx="4032504" cy="1874520"/>
+          </a:xfrm>
+          <a:prstGeom prst="rect">
+            <a:avLst/>
+          </a:prstGeom>
+          <a:noFill/>
+          <a:ln/>
+        </p:spPr>
+        <p:txBody>
+          <a:bodyPr wrap="square" rtlCol="0" anchor="t"/>
+          <a:lstStyle/>
+          <a:p>
+            <a:pPr marL="177800" indent="-177800" algn="l">
+              <a:lnSpc>
+                <a:spcPct val="105000"/>
+              </a:lnSpc>
+              <a:spcAft>
+                <a:spcPts val="800"/>
+              </a:spcAft>
+              <a:buSzPct val="100000"/>
+              <a:buChar char="•"/>
+            </a:pPr>
+            <a:r>
               <a:rPr lang="en-US" sz="1600" dirty="0">
                 <a:solidFill>
                   <a:srgbClr val="505060"/>
@@ -13905,9 +14618,224 @@
                 <a:ea typeface="Pretendard" pitchFamily="34" charset="-122"/>
                 <a:cs typeface="Pretendard" pitchFamily="34" charset="-120"/>
               </a:rPr>
-              <a:t>ICTK 같은 보안 기업에 유용</a:t>
-            </a:r>
-            <a:endParaRPr lang="en-US" sz="1600" dirty="0"/>
+              <a:t>변경분을 </a:t>
+            </a:r>
+            <a:r>
+              <a:rPr lang="en-US" sz="1600" dirty="0" err="1">
+                <a:solidFill>
+                  <a:srgbClr val="505060"/>
+                </a:solidFill>
+                <a:latin typeface="Pretendard" pitchFamily="34" charset="0"/>
+                <a:ea typeface="Pretendard" pitchFamily="34" charset="-122"/>
+                <a:cs typeface="Pretendard" pitchFamily="34" charset="-120"/>
+              </a:rPr>
+              <a:t>보안</a:t>
+            </a:r>
+            <a:r>
+              <a:rPr lang="en-US" sz="1600" dirty="0">
+                <a:solidFill>
+                  <a:srgbClr val="505060"/>
+                </a:solidFill>
+                <a:latin typeface="Pretendard" pitchFamily="34" charset="0"/>
+                <a:ea typeface="Pretendard" pitchFamily="34" charset="-122"/>
+                <a:cs typeface="Pretendard" pitchFamily="34" charset="-120"/>
+              </a:rPr>
+              <a:t> </a:t>
+            </a:r>
+            <a:r>
+              <a:rPr lang="en-US" sz="1600" dirty="0" err="1">
+                <a:solidFill>
+                  <a:srgbClr val="505060"/>
+                </a:solidFill>
+                <a:latin typeface="Pretendard" pitchFamily="34" charset="0"/>
+                <a:ea typeface="Pretendard" pitchFamily="34" charset="-122"/>
+                <a:cs typeface="Pretendard" pitchFamily="34" charset="-120"/>
+              </a:rPr>
+              <a:t>취약점</a:t>
+            </a:r>
+            <a:br>
+              <a:rPr lang="en-US" sz="1600" dirty="0">
+                <a:solidFill>
+                  <a:srgbClr val="505060"/>
+                </a:solidFill>
+                <a:latin typeface="Pretendard" pitchFamily="34" charset="0"/>
+                <a:ea typeface="Pretendard" pitchFamily="34" charset="-122"/>
+                <a:cs typeface="Pretendard" pitchFamily="34" charset="-120"/>
+              </a:rPr>
+            </a:br>
+            <a:r>
+              <a:rPr lang="en-US" sz="1600" dirty="0">
+                <a:solidFill>
+                  <a:srgbClr val="505060"/>
+                </a:solidFill>
+                <a:latin typeface="Pretendard" pitchFamily="34" charset="0"/>
+                <a:ea typeface="Pretendard" pitchFamily="34" charset="-122"/>
+                <a:cs typeface="Pretendard" pitchFamily="34" charset="-120"/>
+              </a:rPr>
+              <a:t>(인젝션·인증·데이터 노출) </a:t>
+            </a:r>
+            <a:r>
+              <a:rPr lang="en-US" sz="1600" dirty="0" err="1">
+                <a:solidFill>
+                  <a:srgbClr val="505060"/>
+                </a:solidFill>
+                <a:latin typeface="Pretendard" pitchFamily="34" charset="0"/>
+                <a:ea typeface="Pretendard" pitchFamily="34" charset="-122"/>
+                <a:cs typeface="Pretendard" pitchFamily="34" charset="-120"/>
+              </a:rPr>
+              <a:t>관점에서</a:t>
+            </a:r>
+            <a:r>
+              <a:rPr lang="en-US" sz="1600" dirty="0">
+                <a:solidFill>
+                  <a:srgbClr val="505060"/>
+                </a:solidFill>
+                <a:latin typeface="Pretendard" pitchFamily="34" charset="0"/>
+                <a:ea typeface="Pretendard" pitchFamily="34" charset="-122"/>
+                <a:cs typeface="Pretendard" pitchFamily="34" charset="-120"/>
+              </a:rPr>
+              <a:t> </a:t>
+            </a:r>
+            <a:r>
+              <a:rPr lang="en-US" sz="1600" dirty="0" err="1">
+                <a:solidFill>
+                  <a:srgbClr val="505060"/>
+                </a:solidFill>
+                <a:latin typeface="Pretendard" pitchFamily="34" charset="0"/>
+                <a:ea typeface="Pretendard" pitchFamily="34" charset="-122"/>
+                <a:cs typeface="Pretendard" pitchFamily="34" charset="-120"/>
+              </a:rPr>
+              <a:t>분석</a:t>
+            </a:r>
+            <a:endParaRPr lang="en-US" sz="1600" dirty="0">
+              <a:solidFill>
+                <a:srgbClr val="505060"/>
+              </a:solidFill>
+              <a:latin typeface="Pretendard" pitchFamily="34" charset="0"/>
+              <a:ea typeface="Pretendard" pitchFamily="34" charset="-122"/>
+              <a:cs typeface="Pretendard" pitchFamily="34" charset="-120"/>
+            </a:endParaRPr>
+          </a:p>
+          <a:p>
+            <a:pPr marL="177800" indent="-177800">
+              <a:lnSpc>
+                <a:spcPct val="105000"/>
+              </a:lnSpc>
+              <a:spcAft>
+                <a:spcPts val="800"/>
+              </a:spcAft>
+              <a:buSzPct val="100000"/>
+              <a:buChar char="•"/>
+            </a:pPr>
+            <a:r>
+              <a:rPr lang="ko-KR" altLang="en-US" sz="1600" dirty="0">
+                <a:solidFill>
+                  <a:srgbClr val="505060"/>
+                </a:solidFill>
+                <a:latin typeface="Pretendard" pitchFamily="34" charset="0"/>
+                <a:ea typeface="Pretendard" pitchFamily="34" charset="-122"/>
+                <a:cs typeface="Pretendard" pitchFamily="34" charset="-120"/>
+              </a:rPr>
+              <a:t>변경 사항이 있는 경우에만 수행되므로 수행 전에 </a:t>
+            </a:r>
+            <a:r>
+              <a:rPr lang="en-US" altLang="ko-KR" sz="1600" dirty="0">
+                <a:solidFill>
+                  <a:srgbClr val="505060"/>
+                </a:solidFill>
+                <a:latin typeface="Pretendard" pitchFamily="34" charset="0"/>
+                <a:ea typeface="Pretendard" pitchFamily="34" charset="-122"/>
+                <a:cs typeface="Pretendard" pitchFamily="34" charset="-120"/>
+              </a:rPr>
+              <a:t>‘git commit’ </a:t>
+            </a:r>
+            <a:r>
+              <a:rPr lang="ko-KR" altLang="en-US" sz="1600" dirty="0">
+                <a:solidFill>
+                  <a:srgbClr val="505060"/>
+                </a:solidFill>
+                <a:latin typeface="Pretendard" pitchFamily="34" charset="0"/>
+                <a:ea typeface="Pretendard" pitchFamily="34" charset="-122"/>
+                <a:cs typeface="Pretendard" pitchFamily="34" charset="-120"/>
+              </a:rPr>
+              <a:t>필요</a:t>
+            </a:r>
+            <a:endParaRPr lang="en-US" altLang="ko-KR" sz="1600" dirty="0">
+              <a:solidFill>
+                <a:srgbClr val="505060"/>
+              </a:solidFill>
+              <a:latin typeface="Pretendard" pitchFamily="34" charset="0"/>
+              <a:ea typeface="Pretendard" pitchFamily="34" charset="-122"/>
+              <a:cs typeface="Pretendard" pitchFamily="34" charset="-120"/>
+            </a:endParaRPr>
+          </a:p>
+          <a:p>
+            <a:pPr marL="177800" indent="-177800">
+              <a:lnSpc>
+                <a:spcPct val="105000"/>
+              </a:lnSpc>
+              <a:spcAft>
+                <a:spcPts val="800"/>
+              </a:spcAft>
+              <a:buSzPct val="100000"/>
+              <a:buChar char="•"/>
+            </a:pPr>
+            <a:r>
+              <a:rPr lang="ko-KR" altLang="en-US" sz="1600" dirty="0">
+                <a:solidFill>
+                  <a:srgbClr val="505060"/>
+                </a:solidFill>
+                <a:latin typeface="Pretendard" pitchFamily="34" charset="0"/>
+                <a:ea typeface="Pretendard" pitchFamily="34" charset="-122"/>
+                <a:cs typeface="Pretendard" pitchFamily="34" charset="-120"/>
+              </a:rPr>
+              <a:t>예</a:t>
+            </a:r>
+            <a:r>
+              <a:rPr lang="en-US" altLang="ko-KR" sz="1600" dirty="0">
+                <a:solidFill>
+                  <a:srgbClr val="505060"/>
+                </a:solidFill>
+                <a:latin typeface="Pretendard" pitchFamily="34" charset="0"/>
+                <a:ea typeface="Pretendard" pitchFamily="34" charset="-122"/>
+                <a:cs typeface="Pretendard" pitchFamily="34" charset="-120"/>
+              </a:rPr>
+              <a:t>: /security-review</a:t>
+            </a:r>
+            <a:r>
+              <a:rPr lang="ko-KR" altLang="en-US" sz="1600" dirty="0">
+                <a:solidFill>
+                  <a:srgbClr val="505060"/>
+                </a:solidFill>
+                <a:latin typeface="Pretendard" pitchFamily="34" charset="0"/>
+                <a:ea typeface="Pretendard" pitchFamily="34" charset="-122"/>
+                <a:cs typeface="Pretendard" pitchFamily="34" charset="-120"/>
+              </a:rPr>
+              <a:t> </a:t>
+            </a:r>
+            <a:r>
+              <a:rPr lang="ko-KR" altLang="en-US" sz="1600" dirty="0" err="1">
+                <a:solidFill>
+                  <a:srgbClr val="505060"/>
+                </a:solidFill>
+                <a:latin typeface="Pretendard" pitchFamily="34" charset="0"/>
+                <a:ea typeface="Pretendard" pitchFamily="34" charset="-122"/>
+                <a:cs typeface="Pretendard" pitchFamily="34" charset="-120"/>
+              </a:rPr>
+              <a:t>커밋</a:t>
+            </a:r>
+            <a:r>
+              <a:rPr lang="ko-KR" altLang="en-US" sz="1600" dirty="0">
+                <a:solidFill>
+                  <a:srgbClr val="505060"/>
+                </a:solidFill>
+                <a:latin typeface="Pretendard" pitchFamily="34" charset="0"/>
+                <a:ea typeface="Pretendard" pitchFamily="34" charset="-122"/>
+                <a:cs typeface="Pretendard" pitchFamily="34" charset="-120"/>
+              </a:rPr>
+              <a:t> 후 수행</a:t>
+            </a:r>
+            <a:endParaRPr lang="en-US" altLang="ko-KR" sz="1600" dirty="0"/>
           </a:p>
         </p:txBody>
       </p:sp>

--- a/decks/03-skill-basics/3회차-Skill기초.pptx
+++ b/decks/03-skill-basics/3회차-Skill기초.pptx
@@ -2677,8 +2677,8 @@
         </p:nvSpPr>
         <p:spPr>
           <a:xfrm>
-            <a:off x="457200" y="2011679"/>
-            <a:ext cx="6766560" cy="4081939"/>
+            <a:off x="457200" y="1718784"/>
+            <a:ext cx="6766560" cy="3746184"/>
           </a:xfrm>
           <a:prstGeom prst="roundRect">
             <a:avLst>
@@ -2711,7 +2711,7 @@
         </p:nvSpPr>
         <p:spPr>
           <a:xfrm>
-            <a:off x="457200" y="2011680"/>
+            <a:off x="457200" y="1718784"/>
             <a:ext cx="6766560" cy="502920"/>
           </a:xfrm>
           <a:prstGeom prst="roundRect">
@@ -2740,7 +2740,7 @@
         </p:nvSpPr>
         <p:spPr>
           <a:xfrm>
-            <a:off x="457200" y="2011680"/>
+            <a:off x="457200" y="1718784"/>
             <a:ext cx="6766560" cy="502920"/>
           </a:xfrm>
           <a:prstGeom prst="rect">
@@ -2790,7 +2790,7 @@
         </p:nvSpPr>
         <p:spPr>
           <a:xfrm>
-            <a:off x="658368" y="2697479"/>
+            <a:off x="658368" y="2404583"/>
             <a:ext cx="6400800" cy="2696051"/>
           </a:xfrm>
           <a:prstGeom prst="rect">
@@ -3001,6 +3001,23 @@
               </a:rPr>
               <a:t>에 프롬프트를 제시하여 스킬 작성 요청</a:t>
             </a:r>
+            <a:endParaRPr lang="en-US" altLang="ko-KR" sz="1600" dirty="0">
+              <a:latin typeface="Pretendard" pitchFamily="34" charset="0"/>
+              <a:ea typeface="Pretendard" pitchFamily="34" charset="-122"/>
+              <a:cs typeface="Pretendard" pitchFamily="34" charset="-120"/>
+            </a:endParaRPr>
+          </a:p>
+          <a:p>
+            <a:pPr marL="177800" indent="-177800" algn="l">
+              <a:lnSpc>
+                <a:spcPct val="105000"/>
+              </a:lnSpc>
+              <a:spcAft>
+                <a:spcPts val="1000"/>
+              </a:spcAft>
+              <a:buSzPct val="100000"/>
+              <a:buChar char="•"/>
+            </a:pPr>
             <a:endParaRPr lang="en-US" sz="1600" dirty="0"/>
           </a:p>
         </p:txBody>
@@ -3013,8 +3030,8 @@
         </p:nvSpPr>
         <p:spPr>
           <a:xfrm>
-            <a:off x="7406640" y="2011679"/>
-            <a:ext cx="6766560" cy="4081939"/>
+            <a:off x="7406640" y="1718784"/>
+            <a:ext cx="6766560" cy="3746184"/>
           </a:xfrm>
           <a:prstGeom prst="roundRect">
             <a:avLst>
@@ -3047,7 +3064,7 @@
         </p:nvSpPr>
         <p:spPr>
           <a:xfrm>
-            <a:off x="7406640" y="2011680"/>
+            <a:off x="7406640" y="1718784"/>
             <a:ext cx="6766560" cy="502920"/>
           </a:xfrm>
           <a:prstGeom prst="roundRect">
@@ -3076,7 +3093,7 @@
         </p:nvSpPr>
         <p:spPr>
           <a:xfrm>
-            <a:off x="7406640" y="2011680"/>
+            <a:off x="7406640" y="1718784"/>
             <a:ext cx="6766560" cy="502920"/>
           </a:xfrm>
           <a:prstGeom prst="rect">
@@ -3170,7 +3187,7 @@
         </p:nvSpPr>
         <p:spPr>
           <a:xfrm>
-            <a:off x="7607808" y="2697479"/>
+            <a:off x="7607808" y="2404583"/>
             <a:ext cx="6400800" cy="2696051"/>
           </a:xfrm>
           <a:prstGeom prst="rect">
@@ -3544,7 +3561,7 @@
         </p:nvGrpSpPr>
         <p:grpSpPr>
           <a:xfrm>
-            <a:off x="457200" y="6416531"/>
+            <a:off x="457200" y="5609279"/>
             <a:ext cx="6766560" cy="505770"/>
             <a:chOff x="457200" y="5492123"/>
             <a:chExt cx="5943600" cy="822960"/>
@@ -3553,6 +3570,7 @@
         <p:sp>
           <p:nvSpPr>
             <p:cNvPr id="16" name="Shape 8">
+              <a:hlinkClick r:id="rId4"/>
               <a:extLst>
                 <a:ext uri="{FF2B5EF4-FFF2-40B4-BE49-F238E27FC236}">
                   <a16:creationId xmlns:a16="http://schemas.microsoft.com/office/drawing/2014/main" id="{31003E4D-3F10-3CD0-1A11-259BD3D9D847}"/>
@@ -3645,7 +3663,7 @@
         </p:nvGrpSpPr>
         <p:grpSpPr>
           <a:xfrm>
-            <a:off x="7406640" y="6404625"/>
+            <a:off x="7406640" y="5597373"/>
             <a:ext cx="6766560" cy="505770"/>
             <a:chOff x="457200" y="5492123"/>
             <a:chExt cx="5943600" cy="822960"/>
@@ -3654,6 +3672,7 @@
         <p:sp>
           <p:nvSpPr>
             <p:cNvPr id="19" name="Shape 8">
+              <a:hlinkClick r:id="rId5"/>
               <a:extLst>
                 <a:ext uri="{FF2B5EF4-FFF2-40B4-BE49-F238E27FC236}">
                   <a16:creationId xmlns:a16="http://schemas.microsoft.com/office/drawing/2014/main" id="{E2A40E22-5EF2-13B1-56D6-D16DFA98A0A9}"/>
@@ -3732,6 +3751,580 @@
           </p:txBody>
         </p:sp>
       </p:grpSp>
+      <p:grpSp>
+        <p:nvGrpSpPr>
+          <p:cNvPr id="2" name="그룹 1">
+            <a:extLst>
+              <a:ext uri="{FF2B5EF4-FFF2-40B4-BE49-F238E27FC236}">
+                <a16:creationId xmlns:a16="http://schemas.microsoft.com/office/drawing/2014/main" id="{8EFEB339-57AB-31FE-93D0-F0C10A9721CD}"/>
+              </a:ext>
+            </a:extLst>
+          </p:cNvPr>
+          <p:cNvGrpSpPr/>
+          <p:nvPr/>
+        </p:nvGrpSpPr>
+        <p:grpSpPr>
+          <a:xfrm>
+            <a:off x="457200" y="6243638"/>
+            <a:ext cx="13716000" cy="1477339"/>
+            <a:chOff x="457200" y="5257800"/>
+            <a:chExt cx="13716000" cy="777240"/>
+          </a:xfrm>
+        </p:grpSpPr>
+        <p:sp>
+          <p:nvSpPr>
+            <p:cNvPr id="13" name="Shape 13">
+              <a:extLst>
+                <a:ext uri="{FF2B5EF4-FFF2-40B4-BE49-F238E27FC236}">
+                  <a16:creationId xmlns:a16="http://schemas.microsoft.com/office/drawing/2014/main" id="{6514C80F-DB20-B2CD-F1CE-7891AEFF5A17}"/>
+                </a:ext>
+              </a:extLst>
+            </p:cNvPr>
+            <p:cNvSpPr/>
+            <p:nvPr/>
+          </p:nvSpPr>
+          <p:spPr>
+            <a:xfrm>
+              <a:off x="457200" y="5257800"/>
+              <a:ext cx="13716000" cy="777240"/>
+            </a:xfrm>
+            <a:prstGeom prst="roundRect">
+              <a:avLst>
+                <a:gd name="adj" fmla="val 9412"/>
+              </a:avLst>
+            </a:prstGeom>
+            <a:solidFill>
+              <a:srgbClr val="CCFBF1"/>
+            </a:solidFill>
+            <a:ln/>
+          </p:spPr>
+          <p:txBody>
+            <a:bodyPr/>
+            <a:lstStyle/>
+            <a:p>
+              <a:endParaRPr lang="ko-KR" altLang="en-US"/>
+            </a:p>
+          </p:txBody>
+        </p:sp>
+        <p:sp>
+          <p:nvSpPr>
+            <p:cNvPr id="14" name="Text 14">
+              <a:extLst>
+                <a:ext uri="{FF2B5EF4-FFF2-40B4-BE49-F238E27FC236}">
+                  <a16:creationId xmlns:a16="http://schemas.microsoft.com/office/drawing/2014/main" id="{AAE8150E-5C11-AB29-F81F-1668D0E65881}"/>
+                </a:ext>
+              </a:extLst>
+            </p:cNvPr>
+            <p:cNvSpPr/>
+            <p:nvPr/>
+          </p:nvSpPr>
+          <p:spPr>
+            <a:xfrm>
+              <a:off x="640080" y="5257800"/>
+              <a:ext cx="13350240" cy="777240"/>
+            </a:xfrm>
+            <a:prstGeom prst="rect">
+              <a:avLst/>
+            </a:prstGeom>
+            <a:noFill/>
+            <a:ln/>
+          </p:spPr>
+          <p:txBody>
+            <a:bodyPr wrap="square" rtlCol="0" anchor="ctr"/>
+            <a:lstStyle/>
+            <a:p>
+              <a:pPr marL="0" indent="0" algn="l">
+                <a:lnSpc>
+                  <a:spcPct val="105000"/>
+                </a:lnSpc>
+                <a:buNone/>
+              </a:pPr>
+              <a:r>
+                <a:rPr lang="en-US" sz="1600" b="1" dirty="0">
+                  <a:solidFill>
+                    <a:srgbClr val="2C2926"/>
+                  </a:solidFill>
+                  <a:latin typeface="Pretendard" pitchFamily="34" charset="0"/>
+                  <a:ea typeface="Pretendard" pitchFamily="34" charset="-122"/>
+                  <a:cs typeface="Pretendard" pitchFamily="34" charset="-120"/>
+                </a:rPr>
+                <a:t>Git</a:t>
+              </a:r>
+              <a:r>
+                <a:rPr lang="ko-KR" altLang="en-US" sz="1600" b="1" dirty="0">
+                  <a:solidFill>
+                    <a:srgbClr val="2C2926"/>
+                  </a:solidFill>
+                  <a:latin typeface="Pretendard" pitchFamily="34" charset="0"/>
+                  <a:ea typeface="Pretendard" pitchFamily="34" charset="-122"/>
+                  <a:cs typeface="Pretendard" pitchFamily="34" charset="-120"/>
+                </a:rPr>
+                <a:t> </a:t>
+              </a:r>
+              <a:r>
+                <a:rPr lang="ko-KR" altLang="en-US" sz="1600" b="1" dirty="0" err="1">
+                  <a:solidFill>
+                    <a:srgbClr val="2C2926"/>
+                  </a:solidFill>
+                  <a:latin typeface="Pretendard" pitchFamily="34" charset="0"/>
+                  <a:ea typeface="Pretendard" pitchFamily="34" charset="-122"/>
+                  <a:cs typeface="Pretendard" pitchFamily="34" charset="-120"/>
+                </a:rPr>
+                <a:t>레포지토리</a:t>
+              </a:r>
+              <a:r>
+                <a:rPr lang="ko-KR" altLang="en-US" sz="1600" b="1" dirty="0">
+                  <a:solidFill>
+                    <a:srgbClr val="2C2926"/>
+                  </a:solidFill>
+                  <a:latin typeface="Pretendard" pitchFamily="34" charset="0"/>
+                  <a:ea typeface="Pretendard" pitchFamily="34" charset="-122"/>
+                  <a:cs typeface="Pretendard" pitchFamily="34" charset="-120"/>
+                </a:rPr>
+                <a:t> 생성 및 저장</a:t>
+              </a:r>
+              <a:endParaRPr lang="en-US" altLang="ko-KR" sz="1600" b="1" dirty="0">
+                <a:solidFill>
+                  <a:srgbClr val="2C2926"/>
+                </a:solidFill>
+                <a:latin typeface="Pretendard" pitchFamily="34" charset="0"/>
+                <a:ea typeface="Pretendard" pitchFamily="34" charset="-122"/>
+                <a:cs typeface="Pretendard" pitchFamily="34" charset="-120"/>
+              </a:endParaRPr>
+            </a:p>
+            <a:p>
+              <a:pPr marL="0" indent="0" algn="l">
+                <a:lnSpc>
+                  <a:spcPct val="105000"/>
+                </a:lnSpc>
+                <a:buNone/>
+              </a:pPr>
+              <a:r>
+                <a:rPr lang="ko-KR" altLang="en-US" sz="1400" dirty="0">
+                  <a:solidFill>
+                    <a:srgbClr val="2C2926"/>
+                  </a:solidFill>
+                  <a:latin typeface="Pretendard" pitchFamily="34" charset="0"/>
+                  <a:ea typeface="Pretendard" pitchFamily="34" charset="-122"/>
+                  <a:cs typeface="Pretendard" pitchFamily="34" charset="-120"/>
+                </a:rPr>
+                <a:t>스킬 개발 완료 후 </a:t>
+              </a:r>
+              <a:r>
+                <a:rPr lang="en-US" altLang="ko-KR" sz="1400" dirty="0">
+                  <a:solidFill>
+                    <a:srgbClr val="2C2926"/>
+                  </a:solidFill>
+                  <a:latin typeface="Pretendard" pitchFamily="34" charset="0"/>
+                  <a:ea typeface="Pretendard" pitchFamily="34" charset="-122"/>
+                  <a:cs typeface="Pretendard" pitchFamily="34" charset="-120"/>
+                </a:rPr>
+                <a:t>GitHub</a:t>
+              </a:r>
+              <a:r>
+                <a:rPr lang="ko-KR" altLang="en-US" sz="1400" dirty="0">
+                  <a:solidFill>
+                    <a:srgbClr val="2C2926"/>
+                  </a:solidFill>
+                  <a:latin typeface="Pretendard" pitchFamily="34" charset="0"/>
+                  <a:ea typeface="Pretendard" pitchFamily="34" charset="-122"/>
+                  <a:cs typeface="Pretendard" pitchFamily="34" charset="-120"/>
+                </a:rPr>
+                <a:t>에 </a:t>
+              </a:r>
+              <a:r>
+                <a:rPr lang="ko-KR" altLang="en-US" sz="1400" dirty="0" err="1">
+                  <a:solidFill>
+                    <a:srgbClr val="2C2926"/>
+                  </a:solidFill>
+                  <a:latin typeface="Pretendard" pitchFamily="34" charset="0"/>
+                  <a:ea typeface="Pretendard" pitchFamily="34" charset="-122"/>
+                  <a:cs typeface="Pretendard" pitchFamily="34" charset="-120"/>
+                </a:rPr>
+                <a:t>레포지토리를</a:t>
+              </a:r>
+              <a:r>
+                <a:rPr lang="ko-KR" altLang="en-US" sz="1400" dirty="0">
+                  <a:solidFill>
+                    <a:srgbClr val="2C2926"/>
+                  </a:solidFill>
+                  <a:latin typeface="Pretendard" pitchFamily="34" charset="0"/>
+                  <a:ea typeface="Pretendard" pitchFamily="34" charset="-122"/>
+                  <a:cs typeface="Pretendard" pitchFamily="34" charset="-120"/>
+                </a:rPr>
+                <a:t> 만들고 </a:t>
+              </a:r>
+              <a:r>
+                <a:rPr lang="ko-KR" altLang="en-US" sz="1400" dirty="0" err="1">
+                  <a:solidFill>
+                    <a:srgbClr val="2C2926"/>
+                  </a:solidFill>
+                  <a:latin typeface="Pretendard" pitchFamily="34" charset="0"/>
+                  <a:ea typeface="Pretendard" pitchFamily="34" charset="-122"/>
+                  <a:cs typeface="Pretendard" pitchFamily="34" charset="-120"/>
+                </a:rPr>
+                <a:t>푸시합니다</a:t>
+              </a:r>
+              <a:r>
+                <a:rPr lang="en-US" altLang="ko-KR" sz="1400" dirty="0">
+                  <a:solidFill>
+                    <a:srgbClr val="2C2926"/>
+                  </a:solidFill>
+                  <a:latin typeface="Pretendard" pitchFamily="34" charset="0"/>
+                  <a:ea typeface="Pretendard" pitchFamily="34" charset="-122"/>
+                  <a:cs typeface="Pretendard" pitchFamily="34" charset="-120"/>
+                </a:rPr>
+                <a:t>. </a:t>
+              </a:r>
+              <a:r>
+                <a:rPr lang="ko-KR" altLang="en-US" sz="1400" dirty="0" err="1">
+                  <a:solidFill>
+                    <a:srgbClr val="2C2926"/>
+                  </a:solidFill>
+                  <a:latin typeface="Pretendard" pitchFamily="34" charset="0"/>
+                  <a:ea typeface="Pretendard" pitchFamily="34" charset="-122"/>
+                  <a:cs typeface="Pretendard" pitchFamily="34" charset="-120"/>
+                </a:rPr>
+                <a:t>레포지토리</a:t>
+              </a:r>
+              <a:r>
+                <a:rPr lang="ko-KR" altLang="en-US" sz="1400" dirty="0">
+                  <a:solidFill>
+                    <a:srgbClr val="2C2926"/>
+                  </a:solidFill>
+                  <a:latin typeface="Pretendard" pitchFamily="34" charset="0"/>
+                  <a:ea typeface="Pretendard" pitchFamily="34" charset="-122"/>
+                  <a:cs typeface="Pretendard" pitchFamily="34" charset="-120"/>
+                </a:rPr>
+                <a:t> 생성 후에는 </a:t>
+              </a:r>
+              <a:r>
+                <a:rPr lang="en-US" altLang="ko-KR" sz="1400" dirty="0">
+                  <a:solidFill>
+                    <a:srgbClr val="2C2926"/>
+                  </a:solidFill>
+                  <a:latin typeface="Pretendard" pitchFamily="34" charset="0"/>
+                  <a:ea typeface="Pretendard" pitchFamily="34" charset="-122"/>
+                  <a:cs typeface="Pretendard" pitchFamily="34" charset="-120"/>
+                </a:rPr>
+                <a:t>‘push’ </a:t>
+              </a:r>
+              <a:r>
+                <a:rPr lang="ko-KR" altLang="en-US" sz="1400" dirty="0">
+                  <a:solidFill>
+                    <a:srgbClr val="2C2926"/>
+                  </a:solidFill>
+                  <a:latin typeface="Pretendard" pitchFamily="34" charset="0"/>
+                  <a:ea typeface="Pretendard" pitchFamily="34" charset="-122"/>
+                  <a:cs typeface="Pretendard" pitchFamily="34" charset="-120"/>
+                </a:rPr>
+                <a:t>또는 </a:t>
+              </a:r>
+              <a:r>
+                <a:rPr lang="en-US" altLang="ko-KR" sz="1400" dirty="0">
+                  <a:solidFill>
+                    <a:srgbClr val="2C2926"/>
+                  </a:solidFill>
+                  <a:latin typeface="Pretendard" pitchFamily="34" charset="0"/>
+                  <a:ea typeface="Pretendard" pitchFamily="34" charset="-122"/>
+                  <a:cs typeface="Pretendard" pitchFamily="34" charset="-120"/>
+                </a:rPr>
+                <a:t>‘</a:t>
+              </a:r>
+              <a:r>
+                <a:rPr lang="ko-KR" altLang="en-US" sz="1400" dirty="0">
+                  <a:solidFill>
+                    <a:srgbClr val="2C2926"/>
+                  </a:solidFill>
+                  <a:latin typeface="Pretendard" pitchFamily="34" charset="0"/>
+                  <a:ea typeface="Pretendard" pitchFamily="34" charset="-122"/>
+                  <a:cs typeface="Pretendard" pitchFamily="34" charset="-120"/>
+                </a:rPr>
+                <a:t>푸시</a:t>
+              </a:r>
+              <a:r>
+                <a:rPr lang="en-US" altLang="ko-KR" sz="1400" dirty="0">
+                  <a:solidFill>
+                    <a:srgbClr val="2C2926"/>
+                  </a:solidFill>
+                  <a:latin typeface="Pretendard" pitchFamily="34" charset="0"/>
+                  <a:ea typeface="Pretendard" pitchFamily="34" charset="-122"/>
+                  <a:cs typeface="Pretendard" pitchFamily="34" charset="-120"/>
+                </a:rPr>
+                <a:t>’ </a:t>
+              </a:r>
+              <a:r>
+                <a:rPr lang="ko-KR" altLang="en-US" sz="1400" dirty="0">
+                  <a:solidFill>
+                    <a:srgbClr val="2C2926"/>
+                  </a:solidFill>
+                  <a:latin typeface="Pretendard" pitchFamily="34" charset="0"/>
+                  <a:ea typeface="Pretendard" pitchFamily="34" charset="-122"/>
+                  <a:cs typeface="Pretendard" pitchFamily="34" charset="-120"/>
+                </a:rPr>
+                <a:t>명령으로 변경사항을 업로드합니다</a:t>
+              </a:r>
+              <a:r>
+                <a:rPr lang="en-US" altLang="ko-KR" sz="1400" dirty="0">
+                  <a:solidFill>
+                    <a:srgbClr val="2C2926"/>
+                  </a:solidFill>
+                  <a:latin typeface="Pretendard" pitchFamily="34" charset="0"/>
+                  <a:ea typeface="Pretendard" pitchFamily="34" charset="-122"/>
+                  <a:cs typeface="Pretendard" pitchFamily="34" charset="-120"/>
+                </a:rPr>
+                <a:t>. </a:t>
+              </a:r>
+            </a:p>
+            <a:p>
+              <a:pPr>
+                <a:lnSpc>
+                  <a:spcPct val="105000"/>
+                </a:lnSpc>
+              </a:pPr>
+              <a:r>
+                <a:rPr lang="en-US" sz="1400" dirty="0">
+                  <a:solidFill>
+                    <a:srgbClr val="2C2926"/>
+                  </a:solidFill>
+                  <a:latin typeface="Pretendard" pitchFamily="34" charset="0"/>
+                  <a:ea typeface="Pretendard" pitchFamily="34" charset="-122"/>
+                  <a:cs typeface="Pretendard" pitchFamily="34" charset="-120"/>
+                </a:rPr>
+                <a:t>- Organization </a:t>
+              </a:r>
+              <a:r>
+                <a:rPr lang="ko-KR" altLang="en-US" sz="1400" dirty="0">
+                  <a:solidFill>
+                    <a:srgbClr val="2C2926"/>
+                  </a:solidFill>
+                  <a:latin typeface="Pretendard" pitchFamily="34" charset="0"/>
+                  <a:ea typeface="Pretendard" pitchFamily="34" charset="-122"/>
+                  <a:cs typeface="Pretendard" pitchFamily="34" charset="-120"/>
+                </a:rPr>
+                <a:t>생성</a:t>
+              </a:r>
+              <a:r>
+                <a:rPr lang="en-US" altLang="ko-KR" sz="1400" dirty="0">
+                  <a:solidFill>
+                    <a:srgbClr val="2C2926"/>
+                  </a:solidFill>
+                  <a:latin typeface="Pretendard" pitchFamily="34" charset="0"/>
+                  <a:ea typeface="Pretendard" pitchFamily="34" charset="-122"/>
+                  <a:cs typeface="Pretendard" pitchFamily="34" charset="-120"/>
+                </a:rPr>
+                <a:t>: https://github.com/account/organizations/new</a:t>
+              </a:r>
+            </a:p>
+            <a:p>
+              <a:pPr>
+                <a:lnSpc>
+                  <a:spcPct val="105000"/>
+                </a:lnSpc>
+              </a:pPr>
+              <a:r>
+                <a:rPr lang="en-US" sz="1400" dirty="0">
+                  <a:solidFill>
+                    <a:srgbClr val="2C2926"/>
+                  </a:solidFill>
+                  <a:latin typeface="Pretendard" pitchFamily="34" charset="0"/>
+                  <a:ea typeface="Pretendard" pitchFamily="34" charset="-122"/>
+                  <a:cs typeface="Pretendard" pitchFamily="34" charset="-120"/>
+                </a:rPr>
+                <a:t>- Repository </a:t>
+              </a:r>
+              <a:r>
+                <a:rPr lang="ko-KR" altLang="en-US" sz="1400" dirty="0">
+                  <a:solidFill>
+                    <a:srgbClr val="2C2926"/>
+                  </a:solidFill>
+                  <a:latin typeface="Pretendard" pitchFamily="34" charset="0"/>
+                  <a:ea typeface="Pretendard" pitchFamily="34" charset="-122"/>
+                  <a:cs typeface="Pretendard" pitchFamily="34" charset="-120"/>
+                </a:rPr>
+                <a:t>생성</a:t>
+              </a:r>
+              <a:r>
+                <a:rPr lang="en-US" altLang="ko-KR" sz="1400" dirty="0">
+                  <a:solidFill>
+                    <a:srgbClr val="2C2926"/>
+                  </a:solidFill>
+                  <a:latin typeface="Pretendard" pitchFamily="34" charset="0"/>
+                  <a:ea typeface="Pretendard" pitchFamily="34" charset="-122"/>
+                  <a:cs typeface="Pretendard" pitchFamily="34" charset="-120"/>
+                </a:rPr>
+                <a:t>: </a:t>
+              </a:r>
+              <a:r>
+                <a:rPr lang="en-US" sz="1400" dirty="0">
+                  <a:solidFill>
+                    <a:srgbClr val="2C2926"/>
+                  </a:solidFill>
+                  <a:latin typeface="Pretendard" pitchFamily="34" charset="0"/>
+                  <a:ea typeface="Pretendard" pitchFamily="34" charset="-122"/>
+                  <a:cs typeface="Pretendard" pitchFamily="34" charset="-120"/>
+                </a:rPr>
+                <a:t>Claude Code</a:t>
+              </a:r>
+              <a:r>
+                <a:rPr lang="ko-KR" altLang="en-US" sz="1400" dirty="0">
+                  <a:solidFill>
+                    <a:srgbClr val="2C2926"/>
+                  </a:solidFill>
+                  <a:latin typeface="Pretendard" pitchFamily="34" charset="0"/>
+                  <a:ea typeface="Pretendard" pitchFamily="34" charset="-122"/>
+                  <a:cs typeface="Pretendard" pitchFamily="34" charset="-120"/>
+                </a:rPr>
+                <a:t>에 요청 </a:t>
+              </a:r>
+              <a:r>
+                <a:rPr lang="en-US" altLang="ko-KR" sz="1400" dirty="0">
+                  <a:solidFill>
+                    <a:srgbClr val="2C2926"/>
+                  </a:solidFill>
+                  <a:latin typeface="Pretendard" pitchFamily="34" charset="0"/>
+                  <a:ea typeface="Pretendard" pitchFamily="34" charset="-122"/>
+                  <a:cs typeface="Pretendard" pitchFamily="34" charset="-120"/>
+                  <a:sym typeface="Wingdings" panose="05000000000000000000" pitchFamily="2" charset="2"/>
+                </a:rPr>
+                <a:t></a:t>
+              </a:r>
+              <a:r>
+                <a:rPr lang="en-US" altLang="ko-KR" sz="1400" dirty="0">
+                  <a:solidFill>
+                    <a:srgbClr val="2C2926"/>
+                  </a:solidFill>
+                  <a:latin typeface="Pretendard" pitchFamily="34" charset="0"/>
+                  <a:ea typeface="Pretendard" pitchFamily="34" charset="-122"/>
+                  <a:cs typeface="Pretendard" pitchFamily="34" charset="-120"/>
+                </a:rPr>
+                <a:t> “Organization ‘{ORG</a:t>
+              </a:r>
+              <a:r>
+                <a:rPr lang="ko-KR" altLang="en-US" sz="1400" dirty="0">
+                  <a:solidFill>
+                    <a:srgbClr val="2C2926"/>
+                  </a:solidFill>
+                  <a:latin typeface="Pretendard" pitchFamily="34" charset="0"/>
+                  <a:ea typeface="Pretendard" pitchFamily="34" charset="-122"/>
+                  <a:cs typeface="Pretendard" pitchFamily="34" charset="-120"/>
+                </a:rPr>
+                <a:t>명</a:t>
+              </a:r>
+              <a:r>
+                <a:rPr lang="en-US" altLang="ko-KR" sz="1400" dirty="0">
+                  <a:solidFill>
+                    <a:srgbClr val="2C2926"/>
+                  </a:solidFill>
+                  <a:latin typeface="Pretendard" pitchFamily="34" charset="0"/>
+                  <a:ea typeface="Pretendard" pitchFamily="34" charset="-122"/>
+                  <a:cs typeface="Pretendard" pitchFamily="34" charset="-120"/>
+                </a:rPr>
+                <a:t>}’/Repository ‘{REP</a:t>
+              </a:r>
+              <a:r>
+                <a:rPr lang="ko-KR" altLang="en-US" sz="1400" dirty="0">
+                  <a:solidFill>
+                    <a:srgbClr val="2C2926"/>
+                  </a:solidFill>
+                  <a:latin typeface="Pretendard" pitchFamily="34" charset="0"/>
+                  <a:ea typeface="Pretendard" pitchFamily="34" charset="-122"/>
+                  <a:cs typeface="Pretendard" pitchFamily="34" charset="-120"/>
+                </a:rPr>
+                <a:t>명</a:t>
+              </a:r>
+              <a:r>
+                <a:rPr lang="en-US" altLang="ko-KR" sz="1400" dirty="0">
+                  <a:solidFill>
+                    <a:srgbClr val="2C2926"/>
+                  </a:solidFill>
+                  <a:latin typeface="Pretendard" pitchFamily="34" charset="0"/>
+                  <a:ea typeface="Pretendard" pitchFamily="34" charset="-122"/>
+                  <a:cs typeface="Pretendard" pitchFamily="34" charset="-120"/>
+                </a:rPr>
+                <a:t>}’</a:t>
+              </a:r>
+              <a:r>
+                <a:rPr lang="ko-KR" altLang="en-US" sz="1400" dirty="0">
+                  <a:solidFill>
+                    <a:srgbClr val="2C2926"/>
+                  </a:solidFill>
+                  <a:latin typeface="Pretendard" pitchFamily="34" charset="0"/>
+                  <a:ea typeface="Pretendard" pitchFamily="34" charset="-122"/>
+                  <a:cs typeface="Pretendard" pitchFamily="34" charset="-120"/>
+                </a:rPr>
+                <a:t>을 생성하고 푸시 하세요</a:t>
+              </a:r>
+              <a:r>
+                <a:rPr lang="en-US" altLang="ko-KR" sz="1400" dirty="0">
+                  <a:solidFill>
+                    <a:srgbClr val="2C2926"/>
+                  </a:solidFill>
+                  <a:latin typeface="Pretendard" pitchFamily="34" charset="0"/>
+                  <a:ea typeface="Pretendard" pitchFamily="34" charset="-122"/>
+                  <a:cs typeface="Pretendard" pitchFamily="34" charset="-120"/>
+                </a:rPr>
+                <a:t>”</a:t>
+              </a:r>
+              <a:r>
+                <a:rPr lang="ko-KR" altLang="en-US" sz="1400" dirty="0">
+                  <a:solidFill>
+                    <a:srgbClr val="2C2926"/>
+                  </a:solidFill>
+                  <a:latin typeface="Pretendard" pitchFamily="34" charset="0"/>
+                  <a:ea typeface="Pretendard" pitchFamily="34" charset="-122"/>
+                  <a:cs typeface="Pretendard" pitchFamily="34" charset="-120"/>
+                </a:rPr>
+                <a:t> </a:t>
+              </a:r>
+              <a:br>
+                <a:rPr lang="en-US" altLang="ko-KR" sz="1400" dirty="0">
+                  <a:solidFill>
+                    <a:srgbClr val="2C2926"/>
+                  </a:solidFill>
+                  <a:latin typeface="Pretendard" pitchFamily="34" charset="0"/>
+                  <a:ea typeface="Pretendard" pitchFamily="34" charset="-122"/>
+                  <a:cs typeface="Pretendard" pitchFamily="34" charset="-120"/>
+                </a:rPr>
+              </a:br>
+              <a:r>
+                <a:rPr lang="ko-KR" altLang="en-US" sz="1400" dirty="0">
+                  <a:solidFill>
+                    <a:srgbClr val="2C2926"/>
+                  </a:solidFill>
+                  <a:latin typeface="Pretendard" pitchFamily="34" charset="0"/>
+                  <a:ea typeface="Pretendard" pitchFamily="34" charset="-122"/>
+                  <a:cs typeface="Pretendard" pitchFamily="34" charset="-120"/>
+                </a:rPr>
+                <a:t>                                                                         예</a:t>
+              </a:r>
+              <a:r>
+                <a:rPr lang="en-US" altLang="ko-KR" sz="1400" dirty="0">
+                  <a:solidFill>
+                    <a:srgbClr val="2C2926"/>
+                  </a:solidFill>
+                  <a:latin typeface="Pretendard" pitchFamily="34" charset="0"/>
+                  <a:ea typeface="Pretendard" pitchFamily="34" charset="-122"/>
+                  <a:cs typeface="Pretendard" pitchFamily="34" charset="-120"/>
+                </a:rPr>
+                <a:t>) Organization ‘unicorn-campus’/Repository ‘law-consult’</a:t>
+              </a:r>
+              <a:r>
+                <a:rPr lang="ko-KR" altLang="en-US" sz="1400" dirty="0">
+                  <a:solidFill>
+                    <a:srgbClr val="2C2926"/>
+                  </a:solidFill>
+                  <a:latin typeface="Pretendard" pitchFamily="34" charset="0"/>
+                  <a:ea typeface="Pretendard" pitchFamily="34" charset="-122"/>
+                  <a:cs typeface="Pretendard" pitchFamily="34" charset="-120"/>
+                </a:rPr>
+                <a:t>를 생성하고 푸시 하세요</a:t>
+              </a:r>
+              <a:endParaRPr lang="en-US" sz="1400" dirty="0"/>
+            </a:p>
+          </p:txBody>
+        </p:sp>
+      </p:grpSp>
     </p:spTree>
   </p:cSld>
   <p:clrMapOvr>
@@ -5892,7 +6485,62 @@
                 <a:ea typeface="Pretendard" pitchFamily="34" charset="-122"/>
                 <a:cs typeface="Pretendard" pitchFamily="34" charset="-120"/>
               </a:rPr>
-              <a:t>2주 과제 — 2회차에서 설계한 반복 작업을 Skill로: </a:t>
+              <a:t>2주 과제 — 1회차에서 </a:t>
+            </a:r>
+            <a:r>
+              <a:rPr lang="ko-KR" altLang="en-US" sz="1600" b="1" dirty="0">
+                <a:solidFill>
+                  <a:srgbClr val="92400E"/>
+                </a:solidFill>
+                <a:latin typeface="Pretendard" pitchFamily="34" charset="0"/>
+                <a:ea typeface="Pretendard" pitchFamily="34" charset="-122"/>
+                <a:cs typeface="Pretendard" pitchFamily="34" charset="-120"/>
+              </a:rPr>
+              <a:t>프롬프트로 만든 반복 작업 중 하나를 </a:t>
+            </a:r>
+            <a:r>
+              <a:rPr lang="en-US" sz="1600" b="1" dirty="0" err="1">
+                <a:solidFill>
+                  <a:srgbClr val="92400E"/>
+                </a:solidFill>
+                <a:latin typeface="Pretendard" pitchFamily="34" charset="0"/>
+                <a:ea typeface="Pretendard" pitchFamily="34" charset="-122"/>
+                <a:cs typeface="Pretendard" pitchFamily="34" charset="-120"/>
+              </a:rPr>
+              <a:t>Skill로</a:t>
+            </a:r>
+            <a:r>
+              <a:rPr lang="en-US" sz="1600" b="1" dirty="0">
+                <a:solidFill>
+                  <a:srgbClr val="92400E"/>
+                </a:solidFill>
+                <a:latin typeface="Pretendard" pitchFamily="34" charset="0"/>
+                <a:ea typeface="Pretendard" pitchFamily="34" charset="-122"/>
+                <a:cs typeface="Pretendard" pitchFamily="34" charset="-120"/>
+              </a:rPr>
+              <a:t> </a:t>
+            </a:r>
+            <a:r>
+              <a:rPr lang="ko-KR" altLang="en-US" sz="1600" b="1" dirty="0">
+                <a:solidFill>
+                  <a:srgbClr val="92400E"/>
+                </a:solidFill>
+                <a:latin typeface="Pretendard" pitchFamily="34" charset="0"/>
+                <a:ea typeface="Pretendard" pitchFamily="34" charset="-122"/>
+                <a:cs typeface="Pretendard" pitchFamily="34" charset="-120"/>
+              </a:rPr>
+              <a:t>구현</a:t>
+            </a:r>
+            <a:r>
+              <a:rPr lang="en-US" sz="1600" b="1" dirty="0">
+                <a:solidFill>
+                  <a:srgbClr val="92400E"/>
+                </a:solidFill>
+                <a:latin typeface="Pretendard" pitchFamily="34" charset="0"/>
+                <a:ea typeface="Pretendard" pitchFamily="34" charset="-122"/>
+                <a:cs typeface="Pretendard" pitchFamily="34" charset="-120"/>
+              </a:rPr>
+              <a:t>: </a:t>
             </a:r>
           </a:p>
           <a:p>
@@ -15224,6 +15872,17 @@
               <a:buNone/>
             </a:pPr>
             <a:r>
+              <a:rPr lang="en-US" sz="1700" b="1" dirty="0" err="1">
+                <a:solidFill>
+                  <a:srgbClr val="2C2926"/>
+                </a:solidFill>
+                <a:latin typeface="Pretendard" pitchFamily="34" charset="0"/>
+                <a:ea typeface="Pretendard" pitchFamily="34" charset="-122"/>
+                <a:cs typeface="Pretendard" pitchFamily="34" charset="-120"/>
+              </a:rPr>
+              <a:t>만드는</a:t>
+            </a:r>
+            <a:r>
               <a:rPr lang="en-US" sz="1700" b="1" dirty="0">
                 <a:solidFill>
                   <a:srgbClr val="2C2926"/>
@@ -15232,7 +15891,18 @@
                 <a:ea typeface="Pretendard" pitchFamily="34" charset="-122"/>
                 <a:cs typeface="Pretendard" pitchFamily="34" charset="-120"/>
               </a:rPr>
-              <a:t>만드는 흐름 (3단계)</a:t>
+              <a:t> </a:t>
+            </a:r>
+            <a:r>
+              <a:rPr lang="en-US" sz="1700" b="1" dirty="0" err="1">
+                <a:solidFill>
+                  <a:srgbClr val="2C2926"/>
+                </a:solidFill>
+                <a:latin typeface="Pretendard" pitchFamily="34" charset="0"/>
+                <a:ea typeface="Pretendard" pitchFamily="34" charset="-122"/>
+                <a:cs typeface="Pretendard" pitchFamily="34" charset="-120"/>
+              </a:rPr>
+              <a:t>흐름</a:t>
             </a:r>
             <a:endParaRPr lang="en-US" sz="1700" dirty="0"/>
           </a:p>
@@ -15252,8 +15922,8 @@
         </p:nvGrpSpPr>
         <p:grpSpPr>
           <a:xfrm>
-            <a:off x="457200" y="1965961"/>
-            <a:ext cx="5943600" cy="1520190"/>
+            <a:off x="457200" y="3616063"/>
+            <a:ext cx="5943600" cy="914410"/>
             <a:chOff x="457200" y="1965961"/>
             <a:chExt cx="5943600" cy="1520190"/>
           </a:xfrm>
@@ -15312,6 +15982,17 @@
                 <a:buNone/>
               </a:pPr>
               <a:r>
+                <a:rPr lang="en-US" sz="1600" b="1" dirty="0" err="1">
+                  <a:solidFill>
+                    <a:srgbClr val="FFFFFF"/>
+                  </a:solidFill>
+                  <a:latin typeface="Pretendard" pitchFamily="34" charset="0"/>
+                  <a:ea typeface="Pretendard" pitchFamily="34" charset="-122"/>
+                  <a:cs typeface="Pretendard" pitchFamily="34" charset="-120"/>
+                </a:rPr>
+                <a:t>요청</a:t>
+              </a:r>
+              <a:r>
                 <a:rPr lang="en-US" sz="1600" b="1" dirty="0">
                   <a:solidFill>
                     <a:srgbClr val="FFFFFF"/>
@@ -15320,7 +16001,7 @@
                   <a:ea typeface="Pretendard" pitchFamily="34" charset="-122"/>
                   <a:cs typeface="Pretendard" pitchFamily="34" charset="-120"/>
                 </a:rPr>
-                <a:t>① 요청: ＂</a:t>
+                <a:t>: ＂</a:t>
               </a:r>
               <a:r>
                 <a:rPr lang="ko-KR" altLang="en-US" sz="1600" b="1" dirty="0">
@@ -15427,33 +16108,6 @@
                 </a:rPr>
               </a:br>
               <a:r>
-                <a:rPr lang="en-US" sz="1600" b="1" dirty="0">
-                  <a:solidFill>
-                    <a:srgbClr val="FFFFFF"/>
-                  </a:solidFill>
-                  <a:latin typeface="Pretendard" pitchFamily="34" charset="0"/>
-                  <a:ea typeface="Pretendard" pitchFamily="34" charset="-122"/>
-                  <a:cs typeface="Pretendard" pitchFamily="34" charset="-120"/>
-                </a:rPr>
-                <a:t>&lt;prompt&gt;</a:t>
-              </a:r>
-            </a:p>
-            <a:p>
-              <a:pPr marL="0" indent="0" algn="ctr">
-                <a:buNone/>
-              </a:pPr>
-              <a:r>
-                <a:rPr lang="en-US" sz="1600" b="1" dirty="0">
-                  <a:solidFill>
-                    <a:srgbClr val="FFFFFF"/>
-                  </a:solidFill>
-                  <a:latin typeface="Pretendard" pitchFamily="34" charset="0"/>
-                  <a:ea typeface="Pretendard" pitchFamily="34" charset="-122"/>
-                  <a:cs typeface="Pretendard" pitchFamily="34" charset="-120"/>
-                </a:rPr>
-                <a:t>{</a:t>
-              </a:r>
-              <a:r>
                 <a:rPr lang="ko-KR" altLang="en-US" sz="1600" b="1" dirty="0">
                   <a:solidFill>
                     <a:srgbClr val="FFFFFF"/>
@@ -15462,7 +16116,7 @@
                   <a:ea typeface="Pretendard" pitchFamily="34" charset="-122"/>
                   <a:cs typeface="Pretendard" pitchFamily="34" charset="-120"/>
                 </a:rPr>
-                <a:t>프롬프트 내용</a:t>
+                <a:t>프롬프트</a:t>
               </a:r>
               <a:r>
                 <a:rPr lang="en-US" altLang="ko-KR" sz="1600" b="1" dirty="0">
@@ -15473,31 +16127,7 @@
                   <a:ea typeface="Pretendard" pitchFamily="34" charset="-122"/>
                   <a:cs typeface="Pretendard" pitchFamily="34" charset="-120"/>
                 </a:rPr>
-                <a:t>}</a:t>
-              </a:r>
-              <a:endParaRPr lang="en-US" sz="1600" b="1" dirty="0">
-                <a:solidFill>
-                  <a:srgbClr val="FFFFFF"/>
-                </a:solidFill>
-                <a:latin typeface="Pretendard" pitchFamily="34" charset="0"/>
-                <a:ea typeface="Pretendard" pitchFamily="34" charset="-122"/>
-                <a:cs typeface="Pretendard" pitchFamily="34" charset="-120"/>
-              </a:endParaRPr>
-            </a:p>
-            <a:p>
-              <a:pPr marL="0" indent="0" algn="ctr">
-                <a:buNone/>
-              </a:pPr>
-              <a:r>
-                <a:rPr lang="en-US" sz="1600" b="1" dirty="0">
-                  <a:solidFill>
-                    <a:srgbClr val="FFFFFF"/>
-                  </a:solidFill>
-                  <a:latin typeface="Pretendard" pitchFamily="34" charset="0"/>
-                  <a:ea typeface="Pretendard" pitchFamily="34" charset="-122"/>
-                  <a:cs typeface="Pretendard" pitchFamily="34" charset="-120"/>
-                </a:rPr>
-                <a:t>&lt;/prompt&gt;</a:t>
+                <a:t>: prompts/summary.md</a:t>
               </a:r>
               <a:endParaRPr lang="en-US" sz="1600" dirty="0"/>
             </a:p>
@@ -15518,8 +16148,8 @@
         </p:nvGrpSpPr>
         <p:grpSpPr>
           <a:xfrm>
-            <a:off x="457200" y="3639025"/>
-            <a:ext cx="5943600" cy="822960"/>
+            <a:off x="457200" y="4682580"/>
+            <a:ext cx="5943600" cy="525787"/>
             <a:chOff x="457200" y="3639025"/>
             <a:chExt cx="5943600" cy="822960"/>
           </a:xfrm>
@@ -15578,53 +16208,18 @@
             <a:p>
               <a:pPr algn="ctr"/>
               <a:r>
-                <a:rPr lang="en-US" sz="1600" dirty="0">
+                <a:rPr lang="ko-KR" altLang="en-US" sz="1600" dirty="0">
                   <a:solidFill>
                     <a:schemeClr val="bg1"/>
                   </a:solidFill>
                 </a:rPr>
-                <a:t>② 승인: 폴더·SKILL.md </a:t>
-              </a:r>
-              <a:r>
-                <a:rPr lang="en-US" sz="1600" dirty="0" err="1">
-                  <a:solidFill>
-                    <a:schemeClr val="bg1"/>
-                  </a:solidFill>
-                </a:rPr>
-                <a:t>생성</a:t>
-              </a:r>
-              <a:r>
-                <a:rPr lang="en-US" sz="1600" dirty="0">
-                  <a:solidFill>
-                    <a:schemeClr val="bg1"/>
-                  </a:solidFill>
-                </a:rPr>
-                <a:t> </a:t>
-              </a:r>
-              <a:r>
-                <a:rPr lang="en-US" sz="1600" dirty="0" err="1">
-                  <a:solidFill>
-                    <a:schemeClr val="bg1"/>
-                  </a:solidFill>
-                </a:rPr>
-                <a:t>제안</a:t>
+                <a:t>스킬 생성</a:t>
               </a:r>
               <a:endParaRPr lang="en-US" sz="1600" dirty="0">
                 <a:solidFill>
                   <a:schemeClr val="bg1"/>
                 </a:solidFill>
               </a:endParaRPr>
-            </a:p>
-            <a:p>
-              <a:pPr algn="ctr"/>
-              <a:r>
-                <a:rPr lang="en-US" sz="1600" dirty="0">
-                  <a:solidFill>
-                    <a:schemeClr val="bg1"/>
-                  </a:solidFill>
-                </a:rPr>
-                <a:t>→ Accept/Reject</a:t>
-              </a:r>
             </a:p>
           </p:txBody>
         </p:sp>
@@ -15643,8 +16238,8 @@
         </p:nvGrpSpPr>
         <p:grpSpPr>
           <a:xfrm>
-            <a:off x="457200" y="5492123"/>
-            <a:ext cx="5943600" cy="822960"/>
+            <a:off x="457200" y="6036468"/>
+            <a:ext cx="5943600" cy="714387"/>
             <a:chOff x="457200" y="5492123"/>
             <a:chExt cx="5943600" cy="822960"/>
           </a:xfrm>
@@ -15703,7 +16298,7 @@
                 <a:buNone/>
               </a:pPr>
               <a:r>
-                <a:rPr lang="ko-KR" altLang="en-US" sz="1600" b="1" dirty="0">
+                <a:rPr lang="en-US" sz="1600" b="1" dirty="0" err="1">
                   <a:solidFill>
                     <a:srgbClr val="FFFFFF"/>
                   </a:solidFill>
@@ -15711,7 +16306,7 @@
                   <a:ea typeface="Pretendard" pitchFamily="34" charset="-122"/>
                   <a:cs typeface="Pretendard" pitchFamily="34" charset="-120"/>
                 </a:rPr>
-                <a:t>④</a:t>
+                <a:t>테스트</a:t>
               </a:r>
               <a:r>
                 <a:rPr lang="en-US" sz="1600" b="1" dirty="0">
@@ -15722,7 +16317,29 @@
                   <a:ea typeface="Pretendard" pitchFamily="34" charset="-122"/>
                   <a:cs typeface="Pretendard" pitchFamily="34" charset="-120"/>
                 </a:rPr>
-                <a:t> 테스트: "내가 뭘 바꿨지?"로 자동 호출</a:t>
+                <a:t> </a:t>
+              </a:r>
+              <a:r>
+                <a:rPr lang="ko-KR" altLang="en-US" sz="1600" b="1" dirty="0">
+                  <a:solidFill>
+                    <a:srgbClr val="FFFFFF"/>
+                  </a:solidFill>
+                  <a:latin typeface="Pretendard" pitchFamily="34" charset="0"/>
+                  <a:ea typeface="Pretendard" pitchFamily="34" charset="-122"/>
+                  <a:cs typeface="Pretendard" pitchFamily="34" charset="-120"/>
+                </a:rPr>
+                <a:t>및 개선</a:t>
+              </a:r>
+              <a:r>
+                <a:rPr lang="en-US" sz="1600" b="1" dirty="0">
+                  <a:solidFill>
+                    <a:srgbClr val="FFFFFF"/>
+                  </a:solidFill>
+                  <a:latin typeface="Pretendard" pitchFamily="34" charset="0"/>
+                  <a:ea typeface="Pretendard" pitchFamily="34" charset="-122"/>
+                  <a:cs typeface="Pretendard" pitchFamily="34" charset="-120"/>
+                </a:rPr>
+                <a:t>: "내가 뭘 바꿨지?"로 자동 호출</a:t>
               </a:r>
               <a:endParaRPr lang="en-US" sz="1600" dirty="0"/>
             </a:p>
@@ -15785,242 +16402,263 @@
           </a:p>
         </p:txBody>
       </p:sp>
-      <p:sp>
-        <p:nvSpPr>
-          <p:cNvPr id="13" name="Shape 11"/>
-          <p:cNvSpPr/>
+      <p:grpSp>
+        <p:nvGrpSpPr>
+          <p:cNvPr id="2" name="그룹 1">
+            <a:extLst>
+              <a:ext uri="{FF2B5EF4-FFF2-40B4-BE49-F238E27FC236}">
+                <a16:creationId xmlns:a16="http://schemas.microsoft.com/office/drawing/2014/main" id="{10F9B3CB-8967-5A59-05CE-2546E4FDB111}"/>
+              </a:ext>
+            </a:extLst>
+          </p:cNvPr>
+          <p:cNvGrpSpPr/>
           <p:nvPr/>
-        </p:nvSpPr>
-        <p:spPr>
-          <a:xfrm>
-            <a:off x="6675120" y="2057400"/>
-            <a:ext cx="7498080" cy="3143250"/>
-          </a:xfrm>
-          <a:prstGeom prst="roundRect">
-            <a:avLst>
-              <a:gd name="adj" fmla="val 1967"/>
-            </a:avLst>
-          </a:prstGeom>
-          <a:solidFill>
-            <a:srgbClr val="F5F5F7"/>
-          </a:solidFill>
-          <a:ln w="12700">
+        </p:nvGrpSpPr>
+        <p:grpSpPr>
+          <a:xfrm>
+            <a:off x="6675120" y="3463956"/>
+            <a:ext cx="7498080" cy="2422504"/>
+            <a:chOff x="6675120" y="2057400"/>
+            <a:chExt cx="7498080" cy="3143250"/>
+          </a:xfrm>
+        </p:grpSpPr>
+        <p:sp>
+          <p:nvSpPr>
+            <p:cNvPr id="13" name="Shape 11"/>
+            <p:cNvSpPr/>
+            <p:nvPr/>
+          </p:nvSpPr>
+          <p:spPr>
+            <a:xfrm>
+              <a:off x="6675120" y="2057400"/>
+              <a:ext cx="7498080" cy="3143250"/>
+            </a:xfrm>
+            <a:prstGeom prst="roundRect">
+              <a:avLst>
+                <a:gd name="adj" fmla="val 1967"/>
+              </a:avLst>
+            </a:prstGeom>
             <a:solidFill>
-              <a:srgbClr val="DDDDE0"/>
+              <a:srgbClr val="F5F5F7"/>
             </a:solidFill>
-            <a:prstDash val="solid"/>
-          </a:ln>
-        </p:spPr>
-        <p:txBody>
-          <a:bodyPr/>
-          <a:lstStyle/>
-          <a:p>
-            <a:endParaRPr lang="ko-KR" altLang="en-US"/>
-          </a:p>
-        </p:txBody>
-      </p:sp>
-      <p:sp>
-        <p:nvSpPr>
-          <p:cNvPr id="14" name="Text 12"/>
-          <p:cNvSpPr/>
-          <p:nvPr/>
-        </p:nvSpPr>
-        <p:spPr>
-          <a:xfrm>
-            <a:off x="6839712" y="2167128"/>
-            <a:ext cx="7168896" cy="2719198"/>
-          </a:xfrm>
-          <a:prstGeom prst="rect">
-            <a:avLst/>
-          </a:prstGeom>
-          <a:noFill/>
-          <a:ln/>
-        </p:spPr>
-        <p:txBody>
-          <a:bodyPr wrap="square" rtlCol="0" anchor="t"/>
-          <a:lstStyle/>
-          <a:p>
-            <a:pPr marL="0" indent="0" algn="l">
-              <a:lnSpc>
-                <a:spcPct val="112000"/>
-              </a:lnSpc>
-              <a:buNone/>
-            </a:pPr>
-            <a:r>
-              <a:rPr lang="en-US" sz="1600" dirty="0">
-                <a:solidFill>
-                  <a:srgbClr val="2C2926"/>
-                </a:solidFill>
-                <a:latin typeface="Consolas" pitchFamily="34" charset="0"/>
-                <a:ea typeface="Consolas" pitchFamily="34" charset="-122"/>
-                <a:cs typeface="Consolas" pitchFamily="34" charset="-120"/>
-              </a:rPr>
-              <a:t>---</a:t>
-            </a:r>
-            <a:endParaRPr lang="en-US" sz="1600" dirty="0"/>
-          </a:p>
-          <a:p>
-            <a:pPr marL="0" indent="0" algn="l">
-              <a:lnSpc>
-                <a:spcPct val="112000"/>
-              </a:lnSpc>
-              <a:buNone/>
-            </a:pPr>
-            <a:r>
-              <a:rPr lang="en-US" sz="1600" dirty="0">
-                <a:solidFill>
-                  <a:srgbClr val="2C2926"/>
-                </a:solidFill>
-                <a:latin typeface="Consolas" pitchFamily="34" charset="0"/>
-                <a:ea typeface="Consolas" pitchFamily="34" charset="-122"/>
-                <a:cs typeface="Consolas" pitchFamily="34" charset="-120"/>
-              </a:rPr>
-              <a:t>name: summarize-changes</a:t>
-            </a:r>
-            <a:endParaRPr lang="en-US" sz="1600" dirty="0"/>
-          </a:p>
-          <a:p>
-            <a:pPr marL="0" indent="0" algn="l">
-              <a:lnSpc>
-                <a:spcPct val="112000"/>
-              </a:lnSpc>
-              <a:buNone/>
-            </a:pPr>
-            <a:r>
-              <a:rPr lang="en-US" sz="1600" dirty="0">
-                <a:solidFill>
-                  <a:srgbClr val="2C2926"/>
-                </a:solidFill>
-                <a:latin typeface="Consolas" pitchFamily="34" charset="0"/>
-                <a:ea typeface="Consolas" pitchFamily="34" charset="-122"/>
-                <a:cs typeface="Consolas" pitchFamily="34" charset="-120"/>
-              </a:rPr>
-              <a:t>description: Summarizes recent file changes.</a:t>
-            </a:r>
-            <a:endParaRPr lang="en-US" sz="1600" dirty="0"/>
-          </a:p>
-          <a:p>
-            <a:pPr marL="0" indent="0" algn="l">
-              <a:lnSpc>
-                <a:spcPct val="112000"/>
-              </a:lnSpc>
-              <a:buNone/>
-            </a:pPr>
-            <a:r>
-              <a:rPr lang="en-US" sz="1600" dirty="0">
-                <a:solidFill>
-                  <a:srgbClr val="2C2926"/>
-                </a:solidFill>
-                <a:latin typeface="Consolas" pitchFamily="34" charset="0"/>
-                <a:ea typeface="Consolas" pitchFamily="34" charset="-122"/>
-                <a:cs typeface="Consolas" pitchFamily="34" charset="-120"/>
-              </a:rPr>
-              <a:t>  Use when the user asks what changed.</a:t>
-            </a:r>
-            <a:endParaRPr lang="en-US" sz="1600" dirty="0"/>
-          </a:p>
-          <a:p>
-            <a:pPr marL="0" indent="0" algn="l">
-              <a:lnSpc>
-                <a:spcPct val="112000"/>
-              </a:lnSpc>
-              <a:buNone/>
-            </a:pPr>
-            <a:r>
-              <a:rPr lang="en-US" sz="1600" dirty="0">
-                <a:solidFill>
-                  <a:srgbClr val="2C2926"/>
-                </a:solidFill>
-                <a:latin typeface="Consolas" pitchFamily="34" charset="0"/>
-                <a:ea typeface="Consolas" pitchFamily="34" charset="-122"/>
-                <a:cs typeface="Consolas" pitchFamily="34" charset="-120"/>
-              </a:rPr>
-              <a:t>---</a:t>
-            </a:r>
-            <a:endParaRPr lang="en-US" sz="1600" dirty="0"/>
-          </a:p>
-          <a:p>
-            <a:pPr marL="0" indent="0" algn="l">
-              <a:lnSpc>
-                <a:spcPct val="112000"/>
-              </a:lnSpc>
-              <a:buNone/>
-            </a:pPr>
-            <a:r>
-              <a:rPr lang="en-US" sz="1600" dirty="0">
-                <a:solidFill>
-                  <a:srgbClr val="2C2926"/>
-                </a:solidFill>
-                <a:latin typeface="Consolas" pitchFamily="34" charset="0"/>
-                <a:ea typeface="Consolas" pitchFamily="34" charset="-122"/>
-                <a:cs typeface="Consolas" pitchFamily="34" charset="-120"/>
-              </a:rPr>
-              <a:t># 변경사항 요약</a:t>
-            </a:r>
-            <a:endParaRPr lang="en-US" sz="1600" dirty="0"/>
-          </a:p>
-          <a:p>
-            <a:pPr marL="0" indent="0" algn="l">
-              <a:lnSpc>
-                <a:spcPct val="112000"/>
-              </a:lnSpc>
-              <a:buNone/>
-            </a:pPr>
-            <a:r>
-              <a:rPr lang="en-US" sz="1600" dirty="0">
-                <a:solidFill>
-                  <a:srgbClr val="2C2926"/>
-                </a:solidFill>
-                <a:latin typeface="Consolas" pitchFamily="34" charset="0"/>
-                <a:ea typeface="Consolas" pitchFamily="34" charset="-122"/>
-                <a:cs typeface="Consolas" pitchFamily="34" charset="-120"/>
-              </a:rPr>
-              <a:t>## 작업방법</a:t>
-            </a:r>
-            <a:endParaRPr lang="en-US" sz="1600" dirty="0"/>
-          </a:p>
-          <a:p>
-            <a:pPr marL="0" indent="0" algn="l">
-              <a:lnSpc>
-                <a:spcPct val="112000"/>
-              </a:lnSpc>
-              <a:buNone/>
-            </a:pPr>
-            <a:r>
-              <a:rPr lang="en-US" sz="1600" dirty="0">
-                <a:solidFill>
-                  <a:srgbClr val="2C2926"/>
-                </a:solidFill>
-                <a:latin typeface="Consolas" pitchFamily="34" charset="0"/>
-                <a:ea typeface="Consolas" pitchFamily="34" charset="-122"/>
-                <a:cs typeface="Consolas" pitchFamily="34" charset="-120"/>
-              </a:rPr>
-              <a:t>1. 최근 변경 파일을 확인</a:t>
-            </a:r>
-            <a:endParaRPr lang="en-US" sz="1600" dirty="0"/>
-          </a:p>
-          <a:p>
-            <a:pPr marL="0" indent="0" algn="l">
-              <a:lnSpc>
-                <a:spcPct val="112000"/>
-              </a:lnSpc>
-              <a:buNone/>
-            </a:pPr>
-            <a:r>
-              <a:rPr lang="en-US" sz="1600" dirty="0">
-                <a:solidFill>
-                  <a:srgbClr val="2C2926"/>
-                </a:solidFill>
-                <a:latin typeface="Consolas" pitchFamily="34" charset="0"/>
-                <a:ea typeface="Consolas" pitchFamily="34" charset="-122"/>
-                <a:cs typeface="Consolas" pitchFamily="34" charset="-120"/>
-              </a:rPr>
-              <a:t>2. 변경 요지를 항목으로 정리</a:t>
-            </a:r>
-            <a:endParaRPr lang="en-US" sz="1600" dirty="0"/>
-          </a:p>
-        </p:txBody>
-      </p:sp>
+            <a:ln w="12700">
+              <a:solidFill>
+                <a:srgbClr val="DDDDE0"/>
+              </a:solidFill>
+              <a:prstDash val="solid"/>
+            </a:ln>
+          </p:spPr>
+          <p:txBody>
+            <a:bodyPr/>
+            <a:lstStyle/>
+            <a:p>
+              <a:endParaRPr lang="ko-KR" altLang="en-US" sz="1600"/>
+            </a:p>
+          </p:txBody>
+        </p:sp>
+        <p:sp>
+          <p:nvSpPr>
+            <p:cNvPr id="14" name="Text 12"/>
+            <p:cNvSpPr/>
+            <p:nvPr/>
+          </p:nvSpPr>
+          <p:spPr>
+            <a:xfrm>
+              <a:off x="6839712" y="2167128"/>
+              <a:ext cx="7168896" cy="2719198"/>
+            </a:xfrm>
+            <a:prstGeom prst="rect">
+              <a:avLst/>
+            </a:prstGeom>
+            <a:noFill/>
+            <a:ln/>
+          </p:spPr>
+          <p:txBody>
+            <a:bodyPr wrap="square" rtlCol="0" anchor="t"/>
+            <a:lstStyle/>
+            <a:p>
+              <a:pPr marL="0" indent="0" algn="l">
+                <a:lnSpc>
+                  <a:spcPct val="112000"/>
+                </a:lnSpc>
+                <a:buNone/>
+              </a:pPr>
+              <a:r>
+                <a:rPr lang="en-US" sz="1400" dirty="0">
+                  <a:solidFill>
+                    <a:srgbClr val="2C2926"/>
+                  </a:solidFill>
+                  <a:latin typeface="Consolas" pitchFamily="34" charset="0"/>
+                  <a:ea typeface="Consolas" pitchFamily="34" charset="-122"/>
+                  <a:cs typeface="Consolas" pitchFamily="34" charset="-120"/>
+                </a:rPr>
+                <a:t>---</a:t>
+              </a:r>
+              <a:endParaRPr lang="en-US" sz="1400" dirty="0"/>
+            </a:p>
+            <a:p>
+              <a:pPr marL="0" indent="0" algn="l">
+                <a:lnSpc>
+                  <a:spcPct val="112000"/>
+                </a:lnSpc>
+                <a:buNone/>
+              </a:pPr>
+              <a:r>
+                <a:rPr lang="en-US" sz="1400" dirty="0">
+                  <a:solidFill>
+                    <a:srgbClr val="2C2926"/>
+                  </a:solidFill>
+                  <a:latin typeface="Consolas" pitchFamily="34" charset="0"/>
+                  <a:ea typeface="Consolas" pitchFamily="34" charset="-122"/>
+                  <a:cs typeface="Consolas" pitchFamily="34" charset="-120"/>
+                </a:rPr>
+                <a:t>name: summarize-changes</a:t>
+              </a:r>
+              <a:endParaRPr lang="en-US" sz="1400" dirty="0"/>
+            </a:p>
+            <a:p>
+              <a:pPr marL="0" indent="0" algn="l">
+                <a:lnSpc>
+                  <a:spcPct val="112000"/>
+                </a:lnSpc>
+                <a:buNone/>
+              </a:pPr>
+              <a:r>
+                <a:rPr lang="en-US" sz="1400" dirty="0">
+                  <a:solidFill>
+                    <a:srgbClr val="2C2926"/>
+                  </a:solidFill>
+                  <a:latin typeface="Consolas" pitchFamily="34" charset="0"/>
+                  <a:ea typeface="Consolas" pitchFamily="34" charset="-122"/>
+                  <a:cs typeface="Consolas" pitchFamily="34" charset="-120"/>
+                </a:rPr>
+                <a:t>description: Summarizes recent file changes.</a:t>
+              </a:r>
+              <a:endParaRPr lang="en-US" sz="1400" dirty="0"/>
+            </a:p>
+            <a:p>
+              <a:pPr marL="0" indent="0" algn="l">
+                <a:lnSpc>
+                  <a:spcPct val="112000"/>
+                </a:lnSpc>
+                <a:buNone/>
+              </a:pPr>
+              <a:r>
+                <a:rPr lang="en-US" sz="1400" dirty="0">
+                  <a:solidFill>
+                    <a:srgbClr val="2C2926"/>
+                  </a:solidFill>
+                  <a:latin typeface="Consolas" pitchFamily="34" charset="0"/>
+                  <a:ea typeface="Consolas" pitchFamily="34" charset="-122"/>
+                  <a:cs typeface="Consolas" pitchFamily="34" charset="-120"/>
+                </a:rPr>
+                <a:t>  Use when the user asks what changed.</a:t>
+              </a:r>
+              <a:endParaRPr lang="en-US" sz="1400" dirty="0"/>
+            </a:p>
+            <a:p>
+              <a:pPr marL="0" indent="0" algn="l">
+                <a:lnSpc>
+                  <a:spcPct val="112000"/>
+                </a:lnSpc>
+                <a:buNone/>
+              </a:pPr>
+              <a:r>
+                <a:rPr lang="en-US" sz="1400" dirty="0">
+                  <a:solidFill>
+                    <a:srgbClr val="2C2926"/>
+                  </a:solidFill>
+                  <a:latin typeface="Consolas" pitchFamily="34" charset="0"/>
+                  <a:ea typeface="Consolas" pitchFamily="34" charset="-122"/>
+                  <a:cs typeface="Consolas" pitchFamily="34" charset="-120"/>
+                </a:rPr>
+                <a:t>---</a:t>
+              </a:r>
+              <a:endParaRPr lang="en-US" sz="1400" dirty="0"/>
+            </a:p>
+            <a:p>
+              <a:pPr marL="0" indent="0" algn="l">
+                <a:lnSpc>
+                  <a:spcPct val="112000"/>
+                </a:lnSpc>
+                <a:buNone/>
+              </a:pPr>
+              <a:r>
+                <a:rPr lang="en-US" sz="1400" dirty="0">
+                  <a:solidFill>
+                    <a:srgbClr val="2C2926"/>
+                  </a:solidFill>
+                  <a:latin typeface="Consolas" pitchFamily="34" charset="0"/>
+                  <a:ea typeface="Consolas" pitchFamily="34" charset="-122"/>
+                  <a:cs typeface="Consolas" pitchFamily="34" charset="-120"/>
+                </a:rPr>
+                <a:t># 변경사항 요약</a:t>
+              </a:r>
+              <a:endParaRPr lang="en-US" sz="1400" dirty="0"/>
+            </a:p>
+            <a:p>
+              <a:pPr marL="0" indent="0" algn="l">
+                <a:lnSpc>
+                  <a:spcPct val="112000"/>
+                </a:lnSpc>
+                <a:buNone/>
+              </a:pPr>
+              <a:r>
+                <a:rPr lang="en-US" sz="1400" dirty="0">
+                  <a:solidFill>
+                    <a:srgbClr val="2C2926"/>
+                  </a:solidFill>
+                  <a:latin typeface="Consolas" pitchFamily="34" charset="0"/>
+                  <a:ea typeface="Consolas" pitchFamily="34" charset="-122"/>
+                  <a:cs typeface="Consolas" pitchFamily="34" charset="-120"/>
+                </a:rPr>
+                <a:t>## 작업방법</a:t>
+              </a:r>
+              <a:endParaRPr lang="en-US" sz="1400" dirty="0"/>
+            </a:p>
+            <a:p>
+              <a:pPr marL="0" indent="0" algn="l">
+                <a:lnSpc>
+                  <a:spcPct val="112000"/>
+                </a:lnSpc>
+                <a:buNone/>
+              </a:pPr>
+              <a:r>
+                <a:rPr lang="en-US" sz="1400" dirty="0">
+                  <a:solidFill>
+                    <a:srgbClr val="2C2926"/>
+                  </a:solidFill>
+                  <a:latin typeface="Consolas" pitchFamily="34" charset="0"/>
+                  <a:ea typeface="Consolas" pitchFamily="34" charset="-122"/>
+                  <a:cs typeface="Consolas" pitchFamily="34" charset="-120"/>
+                </a:rPr>
+                <a:t>1. 최근 변경 파일을 확인</a:t>
+              </a:r>
+              <a:endParaRPr lang="en-US" sz="1400" dirty="0"/>
+            </a:p>
+            <a:p>
+              <a:pPr marL="0" indent="0" algn="l">
+                <a:lnSpc>
+                  <a:spcPct val="112000"/>
+                </a:lnSpc>
+                <a:buNone/>
+              </a:pPr>
+              <a:r>
+                <a:rPr lang="en-US" sz="1400" dirty="0">
+                  <a:solidFill>
+                    <a:srgbClr val="2C2926"/>
+                  </a:solidFill>
+                  <a:latin typeface="Consolas" pitchFamily="34" charset="0"/>
+                  <a:ea typeface="Consolas" pitchFamily="34" charset="-122"/>
+                  <a:cs typeface="Consolas" pitchFamily="34" charset="-120"/>
+                </a:rPr>
+                <a:t>2. 변경 요지를 항목으로 정리</a:t>
+              </a:r>
+              <a:endParaRPr lang="en-US" sz="1400" dirty="0"/>
+            </a:p>
+          </p:txBody>
+        </p:sp>
+      </p:grpSp>
       <p:grpSp>
         <p:nvGrpSpPr>
           <p:cNvPr id="17" name="그룹 16">
@@ -16035,7 +16673,7 @@
         </p:nvGrpSpPr>
         <p:grpSpPr>
           <a:xfrm>
-            <a:off x="457200" y="6586544"/>
+            <a:off x="457200" y="6943737"/>
             <a:ext cx="13716000" cy="777240"/>
             <a:chOff x="457200" y="5257800"/>
             <a:chExt cx="13716000" cy="777240"/>
@@ -16219,8 +16857,8 @@
         </p:nvGrpSpPr>
         <p:grpSpPr>
           <a:xfrm>
-            <a:off x="457200" y="4572961"/>
-            <a:ext cx="5943600" cy="822960"/>
+            <a:off x="457200" y="5360474"/>
+            <a:ext cx="5943600" cy="523888"/>
             <a:chOff x="457200" y="4572961"/>
             <a:chExt cx="5943600" cy="822960"/>
           </a:xfrm>
@@ -16291,14 +16929,6 @@
             <a:p>
               <a:pPr algn="ctr"/>
               <a:r>
-                <a:rPr lang="en-US" sz="1600" dirty="0">
-                  <a:solidFill>
-                    <a:schemeClr val="bg1"/>
-                  </a:solidFill>
-                </a:rPr>
-                <a:t>③ </a:t>
-              </a:r>
-              <a:r>
                 <a:rPr lang="ko-KR" altLang="en-US" sz="1600" dirty="0">
                   <a:solidFill>
                     <a:schemeClr val="bg1"/>
@@ -16363,91 +16993,574 @@
           </p:txBody>
         </p:sp>
       </p:grpSp>
-      <p:sp>
-        <p:nvSpPr>
-          <p:cNvPr id="24" name="Shape 11">
+      <p:grpSp>
+        <p:nvGrpSpPr>
+          <p:cNvPr id="28" name="그룹 27">
             <a:extLst>
               <a:ext uri="{FF2B5EF4-FFF2-40B4-BE49-F238E27FC236}">
-                <a16:creationId xmlns:a16="http://schemas.microsoft.com/office/drawing/2014/main" id="{A7C6DA22-388F-3199-CC66-8C898810FC60}"/>
+                <a16:creationId xmlns:a16="http://schemas.microsoft.com/office/drawing/2014/main" id="{6E08A409-C6CF-6600-5EC6-E9F15AE42FC9}"/>
               </a:ext>
             </a:extLst>
           </p:cNvPr>
-          <p:cNvSpPr/>
+          <p:cNvGrpSpPr/>
           <p:nvPr/>
-        </p:nvSpPr>
-        <p:spPr>
-          <a:xfrm>
-            <a:off x="6675120" y="5492123"/>
-            <a:ext cx="7498080" cy="780089"/>
-          </a:xfrm>
-          <a:prstGeom prst="roundRect">
-            <a:avLst>
-              <a:gd name="adj" fmla="val 1967"/>
-            </a:avLst>
-          </a:prstGeom>
-          <a:solidFill>
-            <a:srgbClr val="F5F5F7"/>
-          </a:solidFill>
-          <a:ln w="12700">
+        </p:nvGrpSpPr>
+        <p:grpSpPr>
+          <a:xfrm>
+            <a:off x="6675120" y="6079336"/>
+            <a:ext cx="7498080" cy="628650"/>
+            <a:chOff x="6675120" y="5927897"/>
+            <a:chExt cx="7498080" cy="780089"/>
+          </a:xfrm>
+        </p:grpSpPr>
+        <p:sp>
+          <p:nvSpPr>
+            <p:cNvPr id="24" name="Shape 11">
+              <a:extLst>
+                <a:ext uri="{FF2B5EF4-FFF2-40B4-BE49-F238E27FC236}">
+                  <a16:creationId xmlns:a16="http://schemas.microsoft.com/office/drawing/2014/main" id="{A7C6DA22-388F-3199-CC66-8C898810FC60}"/>
+                </a:ext>
+              </a:extLst>
+            </p:cNvPr>
+            <p:cNvSpPr/>
+            <p:nvPr/>
+          </p:nvSpPr>
+          <p:spPr>
+            <a:xfrm>
+              <a:off x="6675120" y="5927897"/>
+              <a:ext cx="7498080" cy="780089"/>
+            </a:xfrm>
+            <a:prstGeom prst="roundRect">
+              <a:avLst>
+                <a:gd name="adj" fmla="val 1967"/>
+              </a:avLst>
+            </a:prstGeom>
             <a:solidFill>
-              <a:srgbClr val="DDDDE0"/>
+              <a:srgbClr val="F5F5F7"/>
             </a:solidFill>
-            <a:prstDash val="solid"/>
-          </a:ln>
-        </p:spPr>
-        <p:txBody>
-          <a:bodyPr/>
-          <a:lstStyle/>
-          <a:p>
-            <a:endParaRPr lang="ko-KR" altLang="en-US"/>
-          </a:p>
-        </p:txBody>
-      </p:sp>
-      <p:sp>
-        <p:nvSpPr>
-          <p:cNvPr id="26" name="Text 12">
+            <a:ln w="12700">
+              <a:solidFill>
+                <a:srgbClr val="DDDDE0"/>
+              </a:solidFill>
+              <a:prstDash val="solid"/>
+            </a:ln>
+          </p:spPr>
+          <p:txBody>
+            <a:bodyPr/>
+            <a:lstStyle/>
+            <a:p>
+              <a:endParaRPr lang="ko-KR" altLang="en-US"/>
+            </a:p>
+          </p:txBody>
+        </p:sp>
+        <p:sp>
+          <p:nvSpPr>
+            <p:cNvPr id="26" name="Text 12">
+              <a:extLst>
+                <a:ext uri="{FF2B5EF4-FFF2-40B4-BE49-F238E27FC236}">
+                  <a16:creationId xmlns:a16="http://schemas.microsoft.com/office/drawing/2014/main" id="{1579B5EA-89FA-60F5-53FF-86D0A40C0C2F}"/>
+                </a:ext>
+              </a:extLst>
+            </p:cNvPr>
+            <p:cNvSpPr/>
+            <p:nvPr/>
+          </p:nvSpPr>
+          <p:spPr>
+            <a:xfrm>
+              <a:off x="6821424" y="6079336"/>
+              <a:ext cx="7168896" cy="442920"/>
+            </a:xfrm>
+            <a:prstGeom prst="rect">
+              <a:avLst/>
+            </a:prstGeom>
+            <a:noFill/>
+            <a:ln/>
+          </p:spPr>
+          <p:txBody>
+            <a:bodyPr wrap="square" rtlCol="0" anchor="t"/>
+            <a:lstStyle/>
+            <a:p>
+              <a:pPr marL="0" indent="0" algn="l">
+                <a:lnSpc>
+                  <a:spcPct val="112000"/>
+                </a:lnSpc>
+                <a:buNone/>
+              </a:pPr>
+              <a:r>
+                <a:rPr lang="ko-KR" altLang="en-US" sz="1600" dirty="0"/>
+                <a:t>스킬 디렉토리</a:t>
+              </a:r>
+              <a:r>
+                <a:rPr lang="en-US" altLang="ko-KR" sz="1600" dirty="0"/>
+                <a:t>: skills/summarize-changes/SKILL.md</a:t>
+              </a:r>
+              <a:endParaRPr lang="en-US" sz="1600" dirty="0"/>
+            </a:p>
+          </p:txBody>
+        </p:sp>
+      </p:grpSp>
+      <p:grpSp>
+        <p:nvGrpSpPr>
+          <p:cNvPr id="29" name="그룹 28">
             <a:extLst>
               <a:ext uri="{FF2B5EF4-FFF2-40B4-BE49-F238E27FC236}">
-                <a16:creationId xmlns:a16="http://schemas.microsoft.com/office/drawing/2014/main" id="{1579B5EA-89FA-60F5-53FF-86D0A40C0C2F}"/>
+                <a16:creationId xmlns:a16="http://schemas.microsoft.com/office/drawing/2014/main" id="{EF4A3317-8AA3-2748-CAD6-4173F728C5F1}"/>
               </a:ext>
             </a:extLst>
           </p:cNvPr>
-          <p:cNvSpPr/>
+          <p:cNvGrpSpPr/>
           <p:nvPr/>
-        </p:nvSpPr>
-        <p:spPr>
-          <a:xfrm>
-            <a:off x="6821424" y="5643562"/>
-            <a:ext cx="7168896" cy="442920"/>
-          </a:xfrm>
-          <a:prstGeom prst="rect">
-            <a:avLst/>
-          </a:prstGeom>
-          <a:noFill/>
-          <a:ln/>
-        </p:spPr>
-        <p:txBody>
-          <a:bodyPr wrap="square" rtlCol="0" anchor="t"/>
-          <a:lstStyle/>
-          <a:p>
-            <a:pPr marL="0" indent="0" algn="l">
-              <a:lnSpc>
-                <a:spcPct val="112000"/>
-              </a:lnSpc>
-              <a:buNone/>
-            </a:pPr>
-            <a:r>
-              <a:rPr lang="ko-KR" altLang="en-US" sz="1600" dirty="0"/>
-              <a:t>스킬 디렉토리</a:t>
-            </a:r>
-            <a:r>
-              <a:rPr lang="en-US" altLang="ko-KR" sz="1600" dirty="0"/>
-              <a:t>: skills/summarize-changes/SKILL.md</a:t>
-            </a:r>
-            <a:endParaRPr lang="en-US" sz="1600" dirty="0"/>
-          </a:p>
-        </p:txBody>
-      </p:sp>
+        </p:nvGrpSpPr>
+        <p:grpSpPr>
+          <a:xfrm>
+            <a:off x="457200" y="2057399"/>
+            <a:ext cx="5943600" cy="728663"/>
+            <a:chOff x="457200" y="4572961"/>
+            <a:chExt cx="5943600" cy="822960"/>
+          </a:xfrm>
+        </p:grpSpPr>
+        <p:sp>
+          <p:nvSpPr>
+            <p:cNvPr id="30" name="Shape 8">
+              <a:extLst>
+                <a:ext uri="{FF2B5EF4-FFF2-40B4-BE49-F238E27FC236}">
+                  <a16:creationId xmlns:a16="http://schemas.microsoft.com/office/drawing/2014/main" id="{AD1E1D16-0C95-680E-E2DF-091CBC992E35}"/>
+                </a:ext>
+              </a:extLst>
+            </p:cNvPr>
+            <p:cNvSpPr/>
+            <p:nvPr/>
+          </p:nvSpPr>
+          <p:spPr>
+            <a:xfrm>
+              <a:off x="457200" y="4572961"/>
+              <a:ext cx="5943600" cy="822960"/>
+            </a:xfrm>
+            <a:prstGeom prst="roundRect">
+              <a:avLst>
+                <a:gd name="adj" fmla="val 6667"/>
+              </a:avLst>
+            </a:prstGeom>
+            <a:solidFill>
+              <a:srgbClr val="D97706"/>
+            </a:solidFill>
+            <a:ln/>
+          </p:spPr>
+          <p:txBody>
+            <a:bodyPr/>
+            <a:lstStyle/>
+            <a:p>
+              <a:endParaRPr lang="ko-KR" altLang="en-US"/>
+            </a:p>
+          </p:txBody>
+        </p:sp>
+        <p:sp>
+          <p:nvSpPr>
+            <p:cNvPr id="31" name="Text 9">
+              <a:extLst>
+                <a:ext uri="{FF2B5EF4-FFF2-40B4-BE49-F238E27FC236}">
+                  <a16:creationId xmlns:a16="http://schemas.microsoft.com/office/drawing/2014/main" id="{EF4B1B2A-C2E4-F901-8AD9-4EE4D0A4F8CF}"/>
+                </a:ext>
+              </a:extLst>
+            </p:cNvPr>
+            <p:cNvSpPr/>
+            <p:nvPr/>
+          </p:nvSpPr>
+          <p:spPr>
+            <a:xfrm>
+              <a:off x="457200" y="4572961"/>
+              <a:ext cx="5943600" cy="822960"/>
+            </a:xfrm>
+            <a:prstGeom prst="rect">
+              <a:avLst/>
+            </a:prstGeom>
+            <a:solidFill>
+              <a:srgbClr val="D97706"/>
+            </a:solidFill>
+            <a:ln/>
+          </p:spPr>
+          <p:txBody>
+            <a:bodyPr anchor="ctr"/>
+            <a:lstStyle/>
+            <a:p>
+              <a:pPr algn="ctr"/>
+              <a:r>
+                <a:rPr lang="ko-KR" altLang="en-US" sz="1600" dirty="0">
+                  <a:solidFill>
+                    <a:schemeClr val="bg1"/>
+                  </a:solidFill>
+                </a:rPr>
+                <a:t>작업 디렉토리 생성 및 시스템 프롬프트</a:t>
+              </a:r>
+              <a:r>
+                <a:rPr lang="en-US" altLang="ko-KR" sz="1600" dirty="0">
+                  <a:solidFill>
+                    <a:schemeClr val="bg1"/>
+                  </a:solidFill>
+                </a:rPr>
+                <a:t>(AGENTS.md)</a:t>
+              </a:r>
+              <a:r>
+                <a:rPr lang="ko-KR" altLang="en-US" sz="1600" dirty="0">
+                  <a:solidFill>
+                    <a:schemeClr val="bg1"/>
+                  </a:solidFill>
+                </a:rPr>
+                <a:t> 구성</a:t>
+              </a:r>
+              <a:endParaRPr lang="en-US" sz="1600" dirty="0">
+                <a:solidFill>
+                  <a:schemeClr val="bg1"/>
+                </a:solidFill>
+              </a:endParaRPr>
+            </a:p>
+          </p:txBody>
+        </p:sp>
+      </p:grpSp>
+      <p:grpSp>
+        <p:nvGrpSpPr>
+          <p:cNvPr id="32" name="그룹 31">
+            <a:extLst>
+              <a:ext uri="{FF2B5EF4-FFF2-40B4-BE49-F238E27FC236}">
+                <a16:creationId xmlns:a16="http://schemas.microsoft.com/office/drawing/2014/main" id="{A8CCDE0C-9CCD-B260-392E-815D403C8900}"/>
+              </a:ext>
+            </a:extLst>
+          </p:cNvPr>
+          <p:cNvGrpSpPr/>
+          <p:nvPr/>
+        </p:nvGrpSpPr>
+        <p:grpSpPr>
+          <a:xfrm>
+            <a:off x="457200" y="2938169"/>
+            <a:ext cx="5943600" cy="525787"/>
+            <a:chOff x="457200" y="3639025"/>
+            <a:chExt cx="5943600" cy="822960"/>
+          </a:xfrm>
+        </p:grpSpPr>
+        <p:sp>
+          <p:nvSpPr>
+            <p:cNvPr id="33" name="Shape 6">
+              <a:extLst>
+                <a:ext uri="{FF2B5EF4-FFF2-40B4-BE49-F238E27FC236}">
+                  <a16:creationId xmlns:a16="http://schemas.microsoft.com/office/drawing/2014/main" id="{35703942-9751-D732-B8EE-D3141C3A11B1}"/>
+                </a:ext>
+              </a:extLst>
+            </p:cNvPr>
+            <p:cNvSpPr/>
+            <p:nvPr/>
+          </p:nvSpPr>
+          <p:spPr>
+            <a:xfrm>
+              <a:off x="457200" y="3639025"/>
+              <a:ext cx="5943600" cy="822960"/>
+            </a:xfrm>
+            <a:prstGeom prst="roundRect">
+              <a:avLst>
+                <a:gd name="adj" fmla="val 6667"/>
+              </a:avLst>
+            </a:prstGeom>
+            <a:solidFill>
+              <a:srgbClr val="059669"/>
+            </a:solidFill>
+            <a:ln/>
+          </p:spPr>
+          <p:txBody>
+            <a:bodyPr/>
+            <a:lstStyle/>
+            <a:p>
+              <a:endParaRPr lang="ko-KR" altLang="en-US"/>
+            </a:p>
+          </p:txBody>
+        </p:sp>
+        <p:sp>
+          <p:nvSpPr>
+            <p:cNvPr id="34" name="Text 7">
+              <a:extLst>
+                <a:ext uri="{FF2B5EF4-FFF2-40B4-BE49-F238E27FC236}">
+                  <a16:creationId xmlns:a16="http://schemas.microsoft.com/office/drawing/2014/main" id="{A3ADC294-5BE2-D434-CFE2-81ED5551D289}"/>
+                </a:ext>
+              </a:extLst>
+            </p:cNvPr>
+            <p:cNvSpPr/>
+            <p:nvPr/>
+          </p:nvSpPr>
+          <p:spPr>
+            <a:xfrm>
+              <a:off x="457200" y="3639025"/>
+              <a:ext cx="5943600" cy="822960"/>
+            </a:xfrm>
+            <a:prstGeom prst="rect">
+              <a:avLst/>
+            </a:prstGeom>
+            <a:solidFill>
+              <a:srgbClr val="059669"/>
+            </a:solidFill>
+            <a:ln/>
+          </p:spPr>
+          <p:txBody>
+            <a:bodyPr anchor="ctr"/>
+            <a:lstStyle/>
+            <a:p>
+              <a:pPr algn="ctr"/>
+              <a:r>
+                <a:rPr lang="ko-KR" altLang="en-US" sz="1600" dirty="0">
+                  <a:solidFill>
+                    <a:schemeClr val="bg1"/>
+                  </a:solidFill>
+                </a:rPr>
+                <a:t>프롬프트 작성 </a:t>
+              </a:r>
+              <a:r>
+                <a:rPr lang="en-US" altLang="ko-KR" sz="1600" dirty="0">
+                  <a:solidFill>
+                    <a:schemeClr val="bg1"/>
+                  </a:solidFill>
+                  <a:sym typeface="Wingdings" panose="05000000000000000000" pitchFamily="2" charset="2"/>
+                </a:rPr>
+                <a:t> </a:t>
+              </a:r>
+              <a:r>
+                <a:rPr lang="ko-KR" altLang="en-US" sz="1600" dirty="0">
+                  <a:solidFill>
+                    <a:schemeClr val="bg1"/>
+                  </a:solidFill>
+                  <a:sym typeface="Wingdings" panose="05000000000000000000" pitchFamily="2" charset="2"/>
+                </a:rPr>
+                <a:t>테스트 </a:t>
+              </a:r>
+              <a:r>
+                <a:rPr lang="en-US" altLang="ko-KR" sz="1600" dirty="0">
+                  <a:solidFill>
+                    <a:schemeClr val="bg1"/>
+                  </a:solidFill>
+                  <a:sym typeface="Wingdings" panose="05000000000000000000" pitchFamily="2" charset="2"/>
+                </a:rPr>
+                <a:t> </a:t>
+              </a:r>
+              <a:r>
+                <a:rPr lang="ko-KR" altLang="en-US" sz="1600" dirty="0">
+                  <a:solidFill>
+                    <a:schemeClr val="bg1"/>
+                  </a:solidFill>
+                  <a:sym typeface="Wingdings" panose="05000000000000000000" pitchFamily="2" charset="2"/>
+                </a:rPr>
+                <a:t>개선</a:t>
+              </a:r>
+              <a:endParaRPr lang="en-US" sz="1600" dirty="0">
+                <a:solidFill>
+                  <a:schemeClr val="bg1"/>
+                </a:solidFill>
+              </a:endParaRPr>
+            </a:p>
+          </p:txBody>
+        </p:sp>
+      </p:grpSp>
+      <p:grpSp>
+        <p:nvGrpSpPr>
+          <p:cNvPr id="35" name="그룹 34">
+            <a:extLst>
+              <a:ext uri="{FF2B5EF4-FFF2-40B4-BE49-F238E27FC236}">
+                <a16:creationId xmlns:a16="http://schemas.microsoft.com/office/drawing/2014/main" id="{83776E0A-1261-461D-CAE5-2B1BBF95DEED}"/>
+              </a:ext>
+            </a:extLst>
+          </p:cNvPr>
+          <p:cNvGrpSpPr/>
+          <p:nvPr/>
+        </p:nvGrpSpPr>
+        <p:grpSpPr>
+          <a:xfrm>
+            <a:off x="6644640" y="2079431"/>
+            <a:ext cx="7498080" cy="1256700"/>
+            <a:chOff x="6675120" y="5927897"/>
+            <a:chExt cx="7498080" cy="780089"/>
+          </a:xfrm>
+        </p:grpSpPr>
+        <p:sp>
+          <p:nvSpPr>
+            <p:cNvPr id="36" name="Shape 11">
+              <a:extLst>
+                <a:ext uri="{FF2B5EF4-FFF2-40B4-BE49-F238E27FC236}">
+                  <a16:creationId xmlns:a16="http://schemas.microsoft.com/office/drawing/2014/main" id="{6E97120A-21DF-5F87-F9C4-439D345CA8BC}"/>
+                </a:ext>
+              </a:extLst>
+            </p:cNvPr>
+            <p:cNvSpPr/>
+            <p:nvPr/>
+          </p:nvSpPr>
+          <p:spPr>
+            <a:xfrm>
+              <a:off x="6675120" y="5927897"/>
+              <a:ext cx="7498080" cy="780089"/>
+            </a:xfrm>
+            <a:prstGeom prst="roundRect">
+              <a:avLst>
+                <a:gd name="adj" fmla="val 1967"/>
+              </a:avLst>
+            </a:prstGeom>
+            <a:solidFill>
+              <a:srgbClr val="F5F5F7"/>
+            </a:solidFill>
+            <a:ln w="12700">
+              <a:solidFill>
+                <a:srgbClr val="DDDDE0"/>
+              </a:solidFill>
+              <a:prstDash val="solid"/>
+            </a:ln>
+          </p:spPr>
+          <p:txBody>
+            <a:bodyPr/>
+            <a:lstStyle/>
+            <a:p>
+              <a:endParaRPr lang="ko-KR" altLang="en-US"/>
+            </a:p>
+          </p:txBody>
+        </p:sp>
+        <p:sp>
+          <p:nvSpPr>
+            <p:cNvPr id="37" name="Text 12">
+              <a:extLst>
+                <a:ext uri="{FF2B5EF4-FFF2-40B4-BE49-F238E27FC236}">
+                  <a16:creationId xmlns:a16="http://schemas.microsoft.com/office/drawing/2014/main" id="{E6C7B870-B0C2-1E10-2145-8022B7336431}"/>
+                </a:ext>
+              </a:extLst>
+            </p:cNvPr>
+            <p:cNvSpPr/>
+            <p:nvPr/>
+          </p:nvSpPr>
+          <p:spPr>
+            <a:xfrm>
+              <a:off x="6821424" y="6005226"/>
+              <a:ext cx="7217664" cy="622990"/>
+            </a:xfrm>
+            <a:prstGeom prst="rect">
+              <a:avLst/>
+            </a:prstGeom>
+            <a:noFill/>
+            <a:ln/>
+          </p:spPr>
+          <p:txBody>
+            <a:bodyPr wrap="square" rtlCol="0" anchor="t"/>
+            <a:lstStyle/>
+            <a:p>
+              <a:pPr>
+                <a:lnSpc>
+                  <a:spcPct val="112000"/>
+                </a:lnSpc>
+              </a:pPr>
+              <a:r>
+                <a:rPr lang="en-US" altLang="ko-KR" sz="1600" dirty="0"/>
+                <a:t>AGENTS.md </a:t>
+              </a:r>
+              <a:r>
+                <a:rPr lang="ko-KR" altLang="en-US" sz="1600" dirty="0"/>
+                <a:t>예제</a:t>
+              </a:r>
+              <a:r>
+                <a:rPr lang="en-US" altLang="ko-KR" sz="1600" dirty="0"/>
+                <a:t>: </a:t>
+              </a:r>
+              <a:r>
+                <a:rPr lang="en-US" altLang="ko-KR" sz="1200" dirty="0"/>
+                <a:t>https://github.com/unicorn-campus/law-consult/blob/main/AGENTS.md</a:t>
+              </a:r>
+            </a:p>
+            <a:p>
+              <a:pPr marL="179388" indent="-179388">
+                <a:lnSpc>
+                  <a:spcPct val="112000"/>
+                </a:lnSpc>
+                <a:buFontTx/>
+                <a:buChar char="-"/>
+              </a:pPr>
+              <a:r>
+                <a:rPr lang="ko-KR" altLang="en-US" sz="1400" dirty="0"/>
+                <a:t>팀원 구성</a:t>
+              </a:r>
+              <a:r>
+                <a:rPr lang="en-US" altLang="ko-KR" sz="1400" dirty="0"/>
+                <a:t>: </a:t>
+              </a:r>
+              <a:r>
+                <a:rPr lang="ko-KR" altLang="en-US" sz="1400" dirty="0" err="1"/>
+                <a:t>오케스트레이터</a:t>
+              </a:r>
+              <a:r>
+                <a:rPr lang="ko-KR" altLang="en-US" sz="1400" dirty="0"/>
+                <a:t> 빼고 모두 지운 후 </a:t>
+              </a:r>
+              <a:r>
+                <a:rPr lang="en-US" altLang="ko-KR" sz="1400" dirty="0"/>
+                <a:t>Claude Code</a:t>
+              </a:r>
+              <a:r>
+                <a:rPr lang="ko-KR" altLang="en-US" sz="1400" dirty="0"/>
+                <a:t>에게 팀원 구성 요청</a:t>
+              </a:r>
+              <a:br>
+                <a:rPr lang="en-US" altLang="ko-KR" sz="1400" dirty="0"/>
+              </a:br>
+              <a:r>
+                <a:rPr lang="en-US" altLang="ko-KR" sz="1400" dirty="0"/>
+                <a:t>                    “</a:t>
+              </a:r>
+              <a:r>
+                <a:rPr lang="ko-KR" altLang="en-US" sz="1400" dirty="0"/>
+                <a:t>목표에 맞는 팀원을 구성해요</a:t>
+              </a:r>
+              <a:r>
+                <a:rPr lang="en-US" altLang="ko-KR" sz="1400" dirty="0"/>
+                <a:t>”</a:t>
+              </a:r>
+            </a:p>
+            <a:p>
+              <a:pPr marL="179388" indent="-179388">
+                <a:lnSpc>
+                  <a:spcPct val="112000"/>
+                </a:lnSpc>
+                <a:buFontTx/>
+                <a:buChar char="-"/>
+              </a:pPr>
+              <a:r>
+                <a:rPr lang="ko-KR" altLang="en-US" sz="1400" dirty="0"/>
+                <a:t>위 저장소의 </a:t>
+              </a:r>
+              <a:r>
+                <a:rPr lang="en-US" altLang="ko-KR" sz="1400" dirty="0"/>
+                <a:t>references </a:t>
+              </a:r>
+              <a:r>
+                <a:rPr lang="ko-KR" altLang="en-US" sz="1400" dirty="0"/>
+                <a:t>디렉토리의 프롬프트 가이드</a:t>
+              </a:r>
+              <a:r>
+                <a:rPr lang="en-US" altLang="ko-KR" sz="1400" dirty="0"/>
+                <a:t>, pptx </a:t>
+              </a:r>
+              <a:r>
+                <a:rPr lang="ko-KR" altLang="en-US" sz="1400" dirty="0"/>
+                <a:t>가이드</a:t>
+              </a:r>
+              <a:r>
+                <a:rPr lang="en-US" altLang="ko-KR" sz="1400" dirty="0"/>
+                <a:t>, </a:t>
+              </a:r>
+              <a:r>
+                <a:rPr lang="ko-KR" altLang="en-US" sz="1400" dirty="0"/>
+                <a:t>엑셀 가이드 복사</a:t>
+              </a:r>
+              <a:endParaRPr lang="en-US" altLang="ko-KR" sz="1400" dirty="0"/>
+            </a:p>
+            <a:p>
+              <a:pPr>
+                <a:lnSpc>
+                  <a:spcPct val="112000"/>
+                </a:lnSpc>
+              </a:pPr>
+              <a:endParaRPr lang="en-US" sz="1600" dirty="0"/>
+            </a:p>
+          </p:txBody>
+        </p:sp>
+      </p:grpSp>
     </p:spTree>
   </p:cSld>
   <p:clrMapOvr>

--- a/decks/03-skill-basics/3회차-Skill기초.pptx
+++ b/decks/03-skill-basics/3회차-Skill기초.pptx
@@ -1434,7 +1434,7 @@
                 <a:ea typeface="Pretendard" pitchFamily="34" charset="-122"/>
                 <a:cs typeface="Pretendard" pitchFamily="34" charset="-120"/>
               </a:rPr>
-              <a:t>ⓒ ICTK · Unicorn — Claude Code 업무 자동화 부트캠프 3회차 · 무단전재 및 배포 금지</a:t>
+              <a:t>ⓒ Unicorn — Claude Code 업무 자동화 부트캠프 3회차 · 무단전재 및 배포 금지</a:t>
             </a:r>
             <a:endParaRPr lang="en-US" sz="1600" dirty="0"/>
           </a:p>
@@ -2145,6 +2145,17 @@
               <a:buNone/>
             </a:pPr>
             <a:r>
+              <a:rPr lang="en-US" sz="1600" dirty="0" err="1">
+                <a:solidFill>
+                  <a:srgbClr val="505060"/>
+                </a:solidFill>
+                <a:latin typeface="Pretendard" pitchFamily="34" charset="0"/>
+                <a:ea typeface="Pretendard" pitchFamily="34" charset="-122"/>
+                <a:cs typeface="Pretendard" pitchFamily="34" charset="-120"/>
+              </a:rPr>
+              <a:t>임직원</a:t>
+            </a:r>
+            <a:r>
               <a:rPr lang="en-US" sz="1600" dirty="0">
                 <a:solidFill>
                   <a:srgbClr val="505060"/>
@@ -2153,7 +2164,7 @@
                 <a:ea typeface="Pretendard" pitchFamily="34" charset="-122"/>
                 <a:cs typeface="Pretendard" pitchFamily="34" charset="-120"/>
               </a:rPr>
-              <a:t>ICTK 임직원 (비개발자 포함 입문자)</a:t>
+              <a:t> (비개발자 포함 입문자)</a:t>
             </a:r>
             <a:endParaRPr lang="en-US" sz="1600" dirty="0"/>
           </a:p>
@@ -4375,6 +4386,17 @@
               <a:buNone/>
             </a:pPr>
             <a:r>
+              <a:rPr lang="en-US" sz="3200" b="1" dirty="0" err="1">
+                <a:solidFill>
+                  <a:srgbClr val="2C2926"/>
+                </a:solidFill>
+                <a:latin typeface="Pretendard" pitchFamily="34" charset="0"/>
+                <a:ea typeface="Pretendard" pitchFamily="34" charset="-122"/>
+                <a:cs typeface="Pretendard" pitchFamily="34" charset="-120"/>
+              </a:rPr>
+              <a:t>안전</a:t>
+            </a:r>
+            <a:r>
               <a:rPr lang="en-US" sz="3200" b="1" dirty="0">
                 <a:solidFill>
                   <a:srgbClr val="2C2926"/>
@@ -4383,7 +4405,7 @@
                 <a:ea typeface="Pretendard" pitchFamily="34" charset="-122"/>
                 <a:cs typeface="Pretendard" pitchFamily="34" charset="-120"/>
               </a:rPr>
-              <a:t>ICTK 안전 수칙 — 스킬도 "소프트웨어처럼"</a:t>
+              <a:t> 수칙 — 스킬도 "소프트웨어처럼"</a:t>
             </a:r>
             <a:endParaRPr lang="en-US" sz="3200" dirty="0"/>
           </a:p>
@@ -4801,6 +4823,16 @@
               <a:buChar char="•"/>
             </a:pPr>
             <a:r>
+              <a:rPr lang="en-US" dirty="0" err="1">
+                <a:solidFill>
+                  <a:srgbClr val="505060"/>
+                </a:solidFill>
+                <a:ea typeface="Pretendard" pitchFamily="34" charset="-122"/>
+                <a:cs typeface="Pretendard" pitchFamily="34" charset="-120"/>
+              </a:rPr>
+              <a:t>비밀번호·고객정보·핵심</a:t>
+            </a:r>
+            <a:r>
               <a:rPr lang="en-US" dirty="0">
                 <a:solidFill>
                   <a:srgbClr val="505060"/>
@@ -4808,7 +4840,7 @@
                 <a:ea typeface="Pretendard" pitchFamily="34" charset="-122"/>
                 <a:cs typeface="Pretendard" pitchFamily="34" charset="-120"/>
               </a:rPr>
-              <a:t>비밀번호·고객정보·ICTK 핵심 보안 자산 등을 SKILL.md에 그대로 적지 말 것</a:t>
+              <a:t> 보안 자산 등을 SKILL.md에 그대로 적지 말 것</a:t>
             </a:r>
             <a:endParaRPr lang="en-US" dirty="0"/>
           </a:p>
@@ -14652,7 +14684,7 @@
         <p:spPr>
           <a:xfrm>
             <a:off x="457200" y="1687350"/>
-            <a:ext cx="4434840" cy="2606040"/>
+            <a:ext cx="4434840" cy="2262858"/>
           </a:xfrm>
           <a:prstGeom prst="roundRect">
             <a:avLst>
@@ -14824,7 +14856,7 @@
         <p:spPr>
           <a:xfrm>
             <a:off x="5093208" y="1687350"/>
-            <a:ext cx="4434840" cy="2606040"/>
+            <a:ext cx="4434840" cy="2262858"/>
           </a:xfrm>
           <a:prstGeom prst="roundRect">
             <a:avLst>
@@ -15133,7 +15165,7 @@
         <p:spPr>
           <a:xfrm>
             <a:off x="9729216" y="1687350"/>
-            <a:ext cx="4434840" cy="2606040"/>
+            <a:ext cx="4434840" cy="2262858"/>
           </a:xfrm>
           <a:prstGeom prst="roundRect">
             <a:avLst>
@@ -15489,76 +15521,6 @@
       </p:sp>
       <p:sp>
         <p:nvSpPr>
-          <p:cNvPr id="17" name="Text 15"/>
-          <p:cNvSpPr/>
-          <p:nvPr/>
-        </p:nvSpPr>
-        <p:spPr>
-          <a:xfrm>
-            <a:off x="502920" y="4700585"/>
-            <a:ext cx="13716000" cy="1005840"/>
-          </a:xfrm>
-          <a:prstGeom prst="rect">
-            <a:avLst/>
-          </a:prstGeom>
-          <a:noFill/>
-          <a:ln/>
-        </p:spPr>
-        <p:txBody>
-          <a:bodyPr wrap="square" rtlCol="0" anchor="t"/>
-          <a:lstStyle/>
-          <a:p>
-            <a:pPr marL="177800" indent="-177800" algn="l">
-              <a:lnSpc>
-                <a:spcPct val="105000"/>
-              </a:lnSpc>
-              <a:spcAft>
-                <a:spcPts val="800"/>
-              </a:spcAft>
-              <a:buSzPct val="100000"/>
-              <a:buChar char="•"/>
-            </a:pPr>
-            <a:r>
-              <a:rPr lang="en-US" sz="1600" dirty="0">
-                <a:solidFill>
-                  <a:srgbClr val="505060"/>
-                </a:solidFill>
-                <a:latin typeface="Pretendard" pitchFamily="34" charset="0"/>
-                <a:ea typeface="Pretendard" pitchFamily="34" charset="-122"/>
-                <a:cs typeface="Pretendard" pitchFamily="34" charset="-120"/>
-              </a:rPr>
-              <a:t>이 밖에 /review(PR 리뷰), /loop(반복 실행) 등도 기본 제공</a:t>
-            </a:r>
-            <a:endParaRPr lang="en-US" sz="1600" dirty="0"/>
-          </a:p>
-          <a:p>
-            <a:pPr marL="177800" indent="-177800" algn="l">
-              <a:lnSpc>
-                <a:spcPct val="105000"/>
-              </a:lnSpc>
-              <a:spcAft>
-                <a:spcPts val="800"/>
-              </a:spcAft>
-              <a:buSzPct val="100000"/>
-              <a:buChar char="•"/>
-            </a:pPr>
-            <a:r>
-              <a:rPr lang="en-US" sz="1600" b="1" dirty="0">
-                <a:solidFill>
-                  <a:srgbClr val="2C2926"/>
-                </a:solidFill>
-                <a:latin typeface="Pretendard" pitchFamily="34" charset="0"/>
-                <a:ea typeface="Pretendard" pitchFamily="34" charset="-122"/>
-                <a:cs typeface="Pretendard" pitchFamily="34" charset="-120"/>
-              </a:rPr>
-              <a:t>데스크톱 Code 탭 주의: /permissions·/config·/agents·/doctor는 Code 탭 미지원 → ⚙️ Settings로 대체</a:t>
-            </a:r>
-            <a:endParaRPr lang="en-US" sz="1600" dirty="0"/>
-          </a:p>
-        </p:txBody>
-      </p:sp>
-      <p:sp>
-        <p:nvSpPr>
           <p:cNvPr id="25" name="Slide Number Placeholder 0"/>
           <p:cNvSpPr>
             <a:spLocks noGrp="1"/>
@@ -15619,7 +15581,7 @@
         </p:nvGrpSpPr>
         <p:grpSpPr>
           <a:xfrm>
-            <a:off x="448056" y="5849300"/>
+            <a:off x="448056" y="6923725"/>
             <a:ext cx="13716000" cy="777240"/>
             <a:chOff x="457200" y="5440680"/>
             <a:chExt cx="13716000" cy="777240"/>
@@ -15738,12 +15700,563 @@
               </a:r>
               <a:r>
                 <a:rPr lang="ko-KR" altLang="en-US" sz="1600" dirty="0"/>
-                <a:t>https://github.com/unicorn-campus/ictk/blob/main/references/claude-code-builtin-skills.md</a:t>
+                <a:t>https://github.com/unicorn-campus/</a:t>
+              </a:r>
+              <a:r>
+                <a:rPr lang="en-US" altLang="ko-KR" sz="1600" dirty="0"/>
+                <a:t>ai-automation</a:t>
+              </a:r>
+              <a:r>
+                <a:rPr lang="ko-KR" altLang="en-US" sz="1600" dirty="0"/>
+                <a:t>/blob/main/references/claude-code-builtin-skills.md</a:t>
               </a:r>
             </a:p>
           </p:txBody>
         </p:sp>
       </p:grpSp>
+      <p:sp>
+        <p:nvSpPr>
+          <p:cNvPr id="24" name="TextBox 23">
+            <a:extLst>
+              <a:ext uri="{FF2B5EF4-FFF2-40B4-BE49-F238E27FC236}">
+                <a16:creationId xmlns:a16="http://schemas.microsoft.com/office/drawing/2014/main" id="{A04446B6-BE5E-4E9E-B7EE-620F136ECD65}"/>
+              </a:ext>
+            </a:extLst>
+          </p:cNvPr>
+          <p:cNvSpPr txBox="1"/>
+          <p:nvPr/>
+        </p:nvSpPr>
+        <p:spPr>
+          <a:xfrm>
+            <a:off x="457200" y="4140200"/>
+            <a:ext cx="13716000" cy="355600"/>
+          </a:xfrm>
+          <a:prstGeom prst="rect">
+            <a:avLst/>
+          </a:prstGeom>
+          <a:noFill/>
+        </p:spPr>
+        <p:txBody>
+          <a:bodyPr vertOverflow="overflow" vert="horz" wrap="square" rtlCol="0" anchor="ctr" anchorCtr="0">
+            <a:spAutoFit/>
+          </a:bodyPr>
+          <a:lstStyle/>
+          <a:p>
+            <a:pPr algn="l"/>
+            <a:r>
+              <a:rPr lang="en-US" altLang="ko-KR" b="1">
+                <a:solidFill>
+                  <a:srgbClr val="0D9488"/>
+                </a:solidFill>
+                <a:latin typeface="Pretendard"/>
+                <a:ea typeface="Pretendard"/>
+                <a:cs typeface="Pretendard"/>
+              </a:rPr>
+              <a:t>/simplify · </a:t>
+            </a:r>
+            <a:r>
+              <a:rPr lang="ko-KR" altLang="en-US" b="1">
+                <a:solidFill>
+                  <a:srgbClr val="0D9488"/>
+                </a:solidFill>
+                <a:latin typeface="Pretendard"/>
+                <a:ea typeface="Pretendard"/>
+                <a:cs typeface="Pretendard"/>
+              </a:rPr>
+              <a:t>코드 다듬기 </a:t>
+            </a:r>
+            <a:r>
+              <a:rPr lang="en-US" altLang="ko-KR" b="1">
+                <a:solidFill>
+                  <a:srgbClr val="0D9488"/>
+                </a:solidFill>
+                <a:latin typeface="Pretendard"/>
+                <a:ea typeface="Pretendard"/>
+                <a:cs typeface="Pretendard"/>
+              </a:rPr>
+              <a:t>— </a:t>
+            </a:r>
+            <a:r>
+              <a:rPr lang="ko-KR" altLang="en-US" b="1">
+                <a:solidFill>
+                  <a:srgbClr val="0D9488"/>
+                </a:solidFill>
+                <a:latin typeface="Pretendard"/>
+                <a:ea typeface="Pretendard"/>
+                <a:cs typeface="Pretendard"/>
+              </a:rPr>
+              <a:t>네 가지 관점으로 자동 검토</a:t>
+            </a:r>
+          </a:p>
+        </p:txBody>
+      </p:sp>
+      <p:graphicFrame>
+        <p:nvGraphicFramePr>
+          <p:cNvPr id="27" name="표 26">
+            <a:extLst>
+              <a:ext uri="{FF2B5EF4-FFF2-40B4-BE49-F238E27FC236}">
+                <a16:creationId xmlns:a16="http://schemas.microsoft.com/office/drawing/2014/main" id="{1BB23731-8DF5-454F-AFC5-A422451846CA}"/>
+              </a:ext>
+            </a:extLst>
+          </p:cNvPr>
+          <p:cNvGraphicFramePr>
+            <a:graphicFrameLocks noGrp="1"/>
+          </p:cNvGraphicFramePr>
+          <p:nvPr>
+            <p:extLst>
+              <p:ext uri="{D42A27DB-BD31-4B8C-83A1-F6EECF244321}">
+                <p14:modId xmlns:p14="http://schemas.microsoft.com/office/powerpoint/2010/main" val="1675777239"/>
+              </p:ext>
+            </p:extLst>
+          </p:nvPr>
+        </p:nvGraphicFramePr>
+        <p:xfrm>
+          <a:off x="457200" y="4572000"/>
+          <a:ext cx="13716000" cy="2209800"/>
+        </p:xfrm>
+        <a:graphic>
+          <a:graphicData uri="http://schemas.openxmlformats.org/drawingml/2006/table">
+            <a:tbl>
+              <a:tblPr firstRow="1" bandRow="1">
+                <a:tableStyleId>{5C22544A-7EE6-4342-B048-85BDC9FD1C3A}</a:tableStyleId>
+              </a:tblPr>
+              <a:tblGrid>
+                <a:gridCol w="3048000">
+                  <a:extLst>
+                    <a:ext uri="{9D8B030D-6E8A-4147-A177-3AD203B41FA5}">
+                      <a16:colId xmlns:a16="http://schemas.microsoft.com/office/drawing/2014/main" val="1446554211"/>
+                    </a:ext>
+                  </a:extLst>
+                </a:gridCol>
+                <a:gridCol w="5588000">
+                  <a:extLst>
+                    <a:ext uri="{9D8B030D-6E8A-4147-A177-3AD203B41FA5}">
+                      <a16:colId xmlns:a16="http://schemas.microsoft.com/office/drawing/2014/main" val="1464366359"/>
+                    </a:ext>
+                  </a:extLst>
+                </a:gridCol>
+                <a:gridCol w="5080000">
+                  <a:extLst>
+                    <a:ext uri="{9D8B030D-6E8A-4147-A177-3AD203B41FA5}">
+                      <a16:colId xmlns:a16="http://schemas.microsoft.com/office/drawing/2014/main" val="3298953421"/>
+                    </a:ext>
+                  </a:extLst>
+                </a:gridCol>
+              </a:tblGrid>
+              <a:tr h="431800">
+                <a:tc>
+                  <a:txBody>
+                    <a:bodyPr/>
+                    <a:lstStyle/>
+                    <a:p>
+                      <a:pPr algn="ctr"/>
+                      <a:r>
+                        <a:rPr lang="ko-KR" altLang="en-US" sz="1500" b="1">
+                          <a:solidFill>
+                            <a:srgbClr val="FFFFFF"/>
+                          </a:solidFill>
+                          <a:latin typeface="Pretendard"/>
+                          <a:ea typeface="Pretendard"/>
+                          <a:cs typeface="Pretendard"/>
+                        </a:rPr>
+                        <a:t>관점</a:t>
+                      </a:r>
+                    </a:p>
+                  </a:txBody>
+                  <a:tcPr anchor="ctr">
+                    <a:solidFill>
+                      <a:srgbClr val="0D9488"/>
+                    </a:solidFill>
+                  </a:tcPr>
+                </a:tc>
+                <a:tc>
+                  <a:txBody>
+                    <a:bodyPr/>
+                    <a:lstStyle/>
+                    <a:p>
+                      <a:pPr algn="ctr"/>
+                      <a:r>
+                        <a:rPr lang="ko-KR" altLang="en-US" sz="1500" b="1">
+                          <a:solidFill>
+                            <a:srgbClr val="FFFFFF"/>
+                          </a:solidFill>
+                          <a:latin typeface="Pretendard"/>
+                          <a:ea typeface="Pretendard"/>
+                          <a:cs typeface="Pretendard"/>
+                        </a:rPr>
+                        <a:t>의미</a:t>
+                      </a:r>
+                    </a:p>
+                  </a:txBody>
+                  <a:tcPr anchor="ctr">
+                    <a:solidFill>
+                      <a:srgbClr val="0D9488"/>
+                    </a:solidFill>
+                  </a:tcPr>
+                </a:tc>
+                <a:tc>
+                  <a:txBody>
+                    <a:bodyPr/>
+                    <a:lstStyle/>
+                    <a:p>
+                      <a:pPr algn="ctr"/>
+                      <a:r>
+                        <a:rPr lang="ko-KR" altLang="en-US" sz="1500" b="1">
+                          <a:solidFill>
+                            <a:srgbClr val="FFFFFF"/>
+                          </a:solidFill>
+                          <a:latin typeface="Pretendard"/>
+                          <a:ea typeface="Pretendard"/>
+                          <a:cs typeface="Pretendard"/>
+                        </a:rPr>
+                        <a:t>예시</a:t>
+                      </a:r>
+                    </a:p>
+                  </a:txBody>
+                  <a:tcPr anchor="ctr">
+                    <a:solidFill>
+                      <a:srgbClr val="0D9488"/>
+                    </a:solidFill>
+                  </a:tcPr>
+                </a:tc>
+                <a:extLst>
+                  <a:ext uri="{0D108BD9-81ED-4DB2-BD59-A6C34878D82A}">
+                    <a16:rowId xmlns:a16="http://schemas.microsoft.com/office/drawing/2014/main" val="549148316"/>
+                  </a:ext>
+                </a:extLst>
+              </a:tr>
+              <a:tr h="444500">
+                <a:tc>
+                  <a:txBody>
+                    <a:bodyPr/>
+                    <a:lstStyle/>
+                    <a:p>
+                      <a:pPr algn="l"/>
+                      <a:r>
+                        <a:rPr lang="ko-KR" altLang="en-US" sz="1400" b="1">
+                          <a:solidFill>
+                            <a:srgbClr val="0D9488"/>
+                          </a:solidFill>
+                          <a:latin typeface="Pretendard"/>
+                          <a:ea typeface="Pretendard"/>
+                          <a:cs typeface="Pretendard"/>
+                        </a:rPr>
+                        <a:t>재사용 (reuse)</a:t>
+                      </a:r>
+                    </a:p>
+                  </a:txBody>
+                  <a:tcPr anchor="ctr">
+                    <a:solidFill>
+                      <a:srgbClr val="F0FBFA"/>
+                    </a:solidFill>
+                  </a:tcPr>
+                </a:tc>
+                <a:tc>
+                  <a:txBody>
+                    <a:bodyPr/>
+                    <a:lstStyle/>
+                    <a:p>
+                      <a:pPr algn="l"/>
+                      <a:r>
+                        <a:rPr lang="ko-KR" altLang="en-US" sz="1400" b="0">
+                          <a:solidFill>
+                            <a:srgbClr val="2C2926"/>
+                          </a:solidFill>
+                          <a:latin typeface="Pretendard"/>
+                          <a:ea typeface="Pretendard"/>
+                          <a:cs typeface="Pretendard"/>
+                        </a:rPr>
+                        <a:t>이미 있는 함수·유틸을 두고 중복 구현한 부분</a:t>
+                      </a:r>
+                    </a:p>
+                  </a:txBody>
+                  <a:tcPr anchor="ctr">
+                    <a:solidFill>
+                      <a:srgbClr val="F0FBFA"/>
+                    </a:solidFill>
+                  </a:tcPr>
+                </a:tc>
+                <a:tc>
+                  <a:txBody>
+                    <a:bodyPr/>
+                    <a:lstStyle/>
+                    <a:p>
+                      <a:pPr algn="l"/>
+                      <a:r>
+                        <a:rPr lang="ko-KR" altLang="en-US" sz="1400" b="0">
+                          <a:solidFill>
+                            <a:srgbClr val="2C2926"/>
+                          </a:solidFill>
+                          <a:latin typeface="Pretendard"/>
+                          <a:ea typeface="Pretendard"/>
+                          <a:cs typeface="Pretendard"/>
+                        </a:rPr>
+                        <a:t>직접 짠 날짜 포맷 → 기존 헬퍼로 교체</a:t>
+                      </a:r>
+                    </a:p>
+                  </a:txBody>
+                  <a:tcPr anchor="ctr">
+                    <a:solidFill>
+                      <a:srgbClr val="F0FBFA"/>
+                    </a:solidFill>
+                  </a:tcPr>
+                </a:tc>
+                <a:extLst>
+                  <a:ext uri="{0D108BD9-81ED-4DB2-BD59-A6C34878D82A}">
+                    <a16:rowId xmlns:a16="http://schemas.microsoft.com/office/drawing/2014/main" val="168561186"/>
+                  </a:ext>
+                </a:extLst>
+              </a:tr>
+              <a:tr h="444500">
+                <a:tc>
+                  <a:txBody>
+                    <a:bodyPr/>
+                    <a:lstStyle/>
+                    <a:p>
+                      <a:pPr algn="l"/>
+                      <a:r>
+                        <a:rPr lang="ko-KR" altLang="en-US" sz="1400" b="1">
+                          <a:solidFill>
+                            <a:srgbClr val="0D9488"/>
+                          </a:solidFill>
+                          <a:latin typeface="Pretendard"/>
+                          <a:ea typeface="Pretendard"/>
+                          <a:cs typeface="Pretendard"/>
+                        </a:rPr>
+                        <a:t>단순화 (simplification)</a:t>
+                      </a:r>
+                    </a:p>
+                  </a:txBody>
+                  <a:tcPr anchor="ctr">
+                    <a:solidFill>
+                      <a:srgbClr val="FFFFFF"/>
+                    </a:solidFill>
+                  </a:tcPr>
+                </a:tc>
+                <a:tc>
+                  <a:txBody>
+                    <a:bodyPr/>
+                    <a:lstStyle/>
+                    <a:p>
+                      <a:pPr algn="l"/>
+                      <a:r>
+                        <a:rPr lang="ko-KR" altLang="en-US" sz="1400" b="0">
+                          <a:solidFill>
+                            <a:srgbClr val="2C2926"/>
+                          </a:solidFill>
+                          <a:latin typeface="Pretendard"/>
+                          <a:ea typeface="Pretendard"/>
+                          <a:cs typeface="Pretendard"/>
+                        </a:rPr>
+                        <a:t>불필요하게 장황하거나 꼬인 로직</a:t>
+                      </a:r>
+                    </a:p>
+                  </a:txBody>
+                  <a:tcPr anchor="ctr">
+                    <a:solidFill>
+                      <a:srgbClr val="FFFFFF"/>
+                    </a:solidFill>
+                  </a:tcPr>
+                </a:tc>
+                <a:tc>
+                  <a:txBody>
+                    <a:bodyPr/>
+                    <a:lstStyle/>
+                    <a:p>
+                      <a:pPr algn="l"/>
+                      <a:r>
+                        <a:rPr lang="ko-KR" altLang="en-US" sz="1400" b="0">
+                          <a:solidFill>
+                            <a:srgbClr val="2C2926"/>
+                          </a:solidFill>
+                          <a:latin typeface="Pretendard"/>
+                          <a:ea typeface="Pretendard"/>
+                          <a:cs typeface="Pretendard"/>
+                        </a:rPr>
+                        <a:t>중첩 if → early return, 군더더기 분기 제거</a:t>
+                      </a:r>
+                    </a:p>
+                  </a:txBody>
+                  <a:tcPr anchor="ctr">
+                    <a:solidFill>
+                      <a:srgbClr val="FFFFFF"/>
+                    </a:solidFill>
+                  </a:tcPr>
+                </a:tc>
+                <a:extLst>
+                  <a:ext uri="{0D108BD9-81ED-4DB2-BD59-A6C34878D82A}">
+                    <a16:rowId xmlns:a16="http://schemas.microsoft.com/office/drawing/2014/main" val="4008589689"/>
+                  </a:ext>
+                </a:extLst>
+              </a:tr>
+              <a:tr h="444500">
+                <a:tc>
+                  <a:txBody>
+                    <a:bodyPr/>
+                    <a:lstStyle/>
+                    <a:p>
+                      <a:pPr algn="l"/>
+                      <a:r>
+                        <a:rPr lang="ko-KR" altLang="en-US" sz="1400" b="1">
+                          <a:solidFill>
+                            <a:srgbClr val="0D9488"/>
+                          </a:solidFill>
+                          <a:latin typeface="Pretendard"/>
+                          <a:ea typeface="Pretendard"/>
+                          <a:cs typeface="Pretendard"/>
+                        </a:rPr>
+                        <a:t>효율 (efficiency)</a:t>
+                      </a:r>
+                    </a:p>
+                  </a:txBody>
+                  <a:tcPr anchor="ctr">
+                    <a:solidFill>
+                      <a:srgbClr val="F0FBFA"/>
+                    </a:solidFill>
+                  </a:tcPr>
+                </a:tc>
+                <a:tc>
+                  <a:txBody>
+                    <a:bodyPr/>
+                    <a:lstStyle/>
+                    <a:p>
+                      <a:pPr algn="l"/>
+                      <a:r>
+                        <a:rPr lang="ko-KR" altLang="en-US" sz="1400" b="0">
+                          <a:solidFill>
+                            <a:srgbClr val="2C2926"/>
+                          </a:solidFill>
+                          <a:latin typeface="Pretendard"/>
+                          <a:ea typeface="Pretendard"/>
+                          <a:cs typeface="Pretendard"/>
+                        </a:rPr>
+                        <a:t>명백히 낭비적인 연산·반복</a:t>
+                      </a:r>
+                    </a:p>
+                  </a:txBody>
+                  <a:tcPr anchor="ctr">
+                    <a:solidFill>
+                      <a:srgbClr val="F0FBFA"/>
+                    </a:solidFill>
+                  </a:tcPr>
+                </a:tc>
+                <a:tc>
+                  <a:txBody>
+                    <a:bodyPr/>
+                    <a:lstStyle/>
+                    <a:p>
+                      <a:pPr algn="l"/>
+                      <a:r>
+                        <a:rPr lang="ko-KR" altLang="en-US" sz="1400" b="0">
+                          <a:solidFill>
+                            <a:srgbClr val="2C2926"/>
+                          </a:solidFill>
+                          <a:latin typeface="Pretendard"/>
+                          <a:ea typeface="Pretendard"/>
+                          <a:cs typeface="Pretendard"/>
+                        </a:rPr>
+                        <a:t>루프 내 반복 계산을 밖으로 빼기</a:t>
+                      </a:r>
+                    </a:p>
+                  </a:txBody>
+                  <a:tcPr anchor="ctr">
+                    <a:solidFill>
+                      <a:srgbClr val="F0FBFA"/>
+                    </a:solidFill>
+                  </a:tcPr>
+                </a:tc>
+                <a:extLst>
+                  <a:ext uri="{0D108BD9-81ED-4DB2-BD59-A6C34878D82A}">
+                    <a16:rowId xmlns:a16="http://schemas.microsoft.com/office/drawing/2014/main" val="939650668"/>
+                  </a:ext>
+                </a:extLst>
+              </a:tr>
+              <a:tr h="444500">
+                <a:tc>
+                  <a:txBody>
+                    <a:bodyPr/>
+                    <a:lstStyle/>
+                    <a:p>
+                      <a:pPr algn="l"/>
+                      <a:r>
+                        <a:rPr lang="ko-KR" altLang="en-US" sz="1400" b="1">
+                          <a:solidFill>
+                            <a:srgbClr val="0D9488"/>
+                          </a:solidFill>
+                          <a:latin typeface="Pretendard"/>
+                          <a:ea typeface="Pretendard"/>
+                          <a:cs typeface="Pretendard"/>
+                        </a:rPr>
+                        <a:t>추상화 수준 (altitude)</a:t>
+                      </a:r>
+                    </a:p>
+                  </a:txBody>
+                  <a:tcPr anchor="ctr">
+                    <a:solidFill>
+                      <a:srgbClr val="FFFFFF"/>
+                    </a:solidFill>
+                  </a:tcPr>
+                </a:tc>
+                <a:tc>
+                  <a:txBody>
+                    <a:bodyPr/>
+                    <a:lstStyle/>
+                    <a:p>
+                      <a:pPr algn="l"/>
+                      <a:r>
+                        <a:rPr lang="ko-KR" altLang="en-US" sz="1400" b="0">
+                          <a:solidFill>
+                            <a:srgbClr val="2C2926"/>
+                          </a:solidFill>
+                          <a:latin typeface="Pretendard"/>
+                          <a:ea typeface="Pretendard"/>
+                          <a:cs typeface="Pretendard"/>
+                        </a:rPr>
+                        <a:t>코드가 적절한 추상화 레벨에 있는지</a:t>
+                      </a:r>
+                    </a:p>
+                  </a:txBody>
+                  <a:tcPr anchor="ctr">
+                    <a:solidFill>
+                      <a:srgbClr val="FFFFFF"/>
+                    </a:solidFill>
+                  </a:tcPr>
+                </a:tc>
+                <a:tc>
+                  <a:txBody>
+                    <a:bodyPr/>
+                    <a:lstStyle/>
+                    <a:p>
+                      <a:pPr algn="l"/>
+                      <a:r>
+                        <a:rPr lang="ko-KR" altLang="en-US" sz="1400" b="0">
+                          <a:solidFill>
+                            <a:srgbClr val="2C2926"/>
+                          </a:solidFill>
+                          <a:latin typeface="Pretendard"/>
+                          <a:ea typeface="Pretendard"/>
+                          <a:cs typeface="Pretendard"/>
+                        </a:rPr>
+                        <a:t>너무 저수준이거나 과도하게 추상화된 부분 정리</a:t>
+                      </a:r>
+                    </a:p>
+                  </a:txBody>
+                  <a:tcPr anchor="ctr">
+                    <a:solidFill>
+                      <a:srgbClr val="FFFFFF"/>
+                    </a:solidFill>
+                  </a:tcPr>
+                </a:tc>
+                <a:extLst>
+                  <a:ext uri="{0D108BD9-81ED-4DB2-BD59-A6C34878D82A}">
+                    <a16:rowId xmlns:a16="http://schemas.microsoft.com/office/drawing/2014/main" val="3197156298"/>
+                  </a:ext>
+                </a:extLst>
+              </a:tr>
+            </a:tbl>
+          </a:graphicData>
+        </a:graphic>
+      </p:graphicFrame>
     </p:spTree>
   </p:cSld>
   <p:clrMapOvr>
